--- a/lecons/F1/14_F1_M3_L08_Atmospheric_Circulation.pptx
+++ b/lecons/F1/14_F1_M3_L08_Atmospheric_Circulation.pptx
@@ -55,9 +55,14 @@
     <p:sldId id="303" r:id="rId49"/>
     <p:sldId id="304" r:id="rId50"/>
     <p:sldId id="305" r:id="rId51"/>
+    <p:sldId id="306" r:id="rId52"/>
+    <p:sldId id="307" r:id="rId53"/>
+    <p:sldId id="308" r:id="rId54"/>
+    <p:sldId id="309" r:id="rId55"/>
+    <p:sldId id="310" r:id="rId56"/>
   </p:sldIdLst>
   <p:notesMasterIdLst>
-    <p:notesMasterId r:id="rId52"/>
+    <p:notesMasterId r:id="rId57"/>
   </p:notesMasterIdLst>
   <p:sldSz cx="12192000" cy="6858000"/>
   <p:notesSz cx="6858000" cy="12192000"/>
@@ -727,7 +732,7 @@
           <a:p>
             <a:r>
               <a:rPr lang="en-US" dirty="0"/>
-              <a:t>Good. Hadiza does not know why the wind changes direction.</a:t>
+              <a:t>Good. Hadiza does not know why the wind changes its direction with the seasons.</a:t>
             </a:r>
             <a:endParaRPr lang="en-US" dirty="0"/>
           </a:p>
@@ -1343,7 +1348,7 @@
           <a:p>
             <a:r>
               <a:rPr lang="en-US" dirty="0"/>
-              <a:t>Activity 1. Look carefully at this picture: a barometer. Observe every detail before I ask the question.</a:t>
+              <a:t>Activity 1. Look carefully at this picture: an instrument of the weather station. Observe every detail before I ask the question.</a:t>
             </a:r>
             <a:endParaRPr lang="en-US" dirty="0"/>
           </a:p>
@@ -1431,7 +1436,7 @@
           <a:p>
             <a:r>
               <a:rPr lang="en-US" dirty="0"/>
-              <a:t>Here is the question for Activity 1: What does a barometer measure? Take one minute to think and write your answer in your rough notebook.</a:t>
+              <a:t>Here is the question for Activity 1: What does this instrument measure? Take one minute to think and write your answer in your rough notebook.</a:t>
             </a:r>
             <a:endParaRPr lang="en-US" dirty="0"/>
           </a:p>
@@ -1607,7 +1612,7 @@
           <a:p>
             <a:r>
               <a:rPr lang="en-US" dirty="0"/>
-              <a:t>Let us check the answer together. Atmospheric pressure, the weight of the air.</a:t>
+              <a:t>Let us check the answer together. The pressure of the air (atmospheric pressure): it is a barometer.</a:t>
             </a:r>
             <a:endParaRPr lang="en-US" dirty="0"/>
           </a:p>
@@ -1783,7 +1788,7 @@
           <a:p>
             <a:r>
               <a:rPr lang="en-US" dirty="0"/>
-              <a:t>Here is the question for Activity 2: Where is pressure low: where air rises or where air sinks? Take one minute to think and write your answer in your rough notebook.</a:t>
+              <a:t>Here is the question for Activity 2: What happens to air when it is heated? Take one minute to think and write your answer in your rough notebook.</a:t>
             </a:r>
             <a:endParaRPr lang="en-US" dirty="0"/>
           </a:p>
@@ -1871,7 +1876,7 @@
           <a:p>
             <a:r>
               <a:rPr lang="en-US" dirty="0"/>
-              <a:t>Let us check the answer together. Pressure is low where hot air rises and high where cool air sinks.</a:t>
+              <a:t>Let us check the answer together. It becomes light and rises, and the pressure below it becomes low.</a:t>
             </a:r>
             <a:endParaRPr lang="en-US" dirty="0"/>
           </a:p>
@@ -2047,7 +2052,7 @@
           <a:p>
             <a:r>
               <a:rPr lang="en-US" dirty="0"/>
-              <a:t>Here is the question for Activity 3: Wind blows from which pressure to which pressure? Take one minute to think and write your answer in your rough notebook.</a:t>
+              <a:t>Here is the question for Activity 3: From which type of pressure does the wind blow? Take one minute to think and write your answer in your rough notebook.</a:t>
             </a:r>
             <a:endParaRPr lang="en-US" dirty="0"/>
           </a:p>
@@ -2135,7 +2140,7 @@
           <a:p>
             <a:r>
               <a:rPr lang="en-US" dirty="0"/>
-              <a:t>Let us check the answer together. From high pressure to low pressure.</a:t>
+              <a:t>Let us check the answer together. From high pressure towards low pressure.</a:t>
             </a:r>
             <a:endParaRPr lang="en-US" dirty="0"/>
           </a:p>
@@ -2223,7 +2228,7 @@
           <a:p>
             <a:r>
               <a:rPr lang="en-US" dirty="0"/>
-              <a:t>Activity 4. Look carefully at this diagram: pressure belts and planetary winds. Observe every detail before I ask the question.</a:t>
+              <a:t>Activity 4. Look carefully at this diagram: pressure belts and winds of the world. Observe every detail before I ask the question.</a:t>
             </a:r>
             <a:endParaRPr lang="en-US" dirty="0"/>
           </a:p>
@@ -2487,7 +2492,7 @@
           <a:p>
             <a:r>
               <a:rPr lang="en-US" dirty="0"/>
-              <a:t>Our topic is Protection against the Wrath of Nature, and the sub-topic is Climatic Disturbances. The key notions we shall use today are: pressure, high pressure, low pressure, wind, pressure belts, planetary winds. At the end, you should be able to do this: learners are able to explain how differences in pressure create winds and describe the main pressure belts and winds.</a:t>
+              <a:t>Our topic is Protection against the Wrath of Nature, and the sub-topic is Climatic Disturbances. The key notions we shall use today are: pressure, high pressure, low pressure, wind, pressure belts. At the end, you should be able to do this: learners are able to explain how differences in pressure create winds and describe the main pressure belts and winds.</a:t>
             </a:r>
             <a:endParaRPr lang="en-US" dirty="0"/>
           </a:p>
@@ -2663,7 +2668,7 @@
           <a:p>
             <a:r>
               <a:rPr lang="en-US" dirty="0"/>
-              <a:t>Here is the question for Activity 5: Where does the Harmattan come from, and what does it bring? Take one minute to think and write your answer in your rough notebook.</a:t>
+              <a:t>Here is the question for Activity 5: What does the Harmattan bring to the north of Cameroon? Take one minute to think and write your answer in your rough notebook.</a:t>
             </a:r>
             <a:endParaRPr lang="en-US" dirty="0"/>
           </a:p>
@@ -2751,7 +2756,7 @@
           <a:p>
             <a:r>
               <a:rPr lang="en-US" dirty="0"/>
-              <a:t>Let us check the answer together. From the Sahara in the north-east; it brings dry, dusty air.</a:t>
+              <a:t>Let us check the answer together. Dry, dusty air from the Sahara.</a:t>
             </a:r>
             <a:endParaRPr lang="en-US" dirty="0"/>
           </a:p>
@@ -2927,7 +2932,7 @@
           <a:p>
             <a:r>
               <a:rPr lang="en-US" dirty="0"/>
-              <a:t>Let us copy the definitions. The key terms of this lesson are defined as follows. On this slide we have Atmospheric pressure and Wind. Write each point on a new line, with the key term first, and explain it in your own words when we revise.</a:t>
+              <a:t>Let us copy the definitions. The key terms of this lesson are defined as follows. On this slide we have Atmospheric pressure and Wind. Write each point on a new line, with the key term first, and explain it in your own words when we revise. When you finish, we go to the next slide.</a:t>
             </a:r>
             <a:endParaRPr lang="en-US" dirty="0"/>
           </a:p>
@@ -3015,7 +3020,7 @@
           <a:p>
             <a:r>
               <a:rPr lang="en-US" dirty="0"/>
-              <a:t>Let us copy Types of Pressure. There are two types of pressure. On this slide we have Low pressure and High pressure. Write each point on a new line, with the key term first, and explain it in your own words when we revise.</a:t>
+              <a:t>We continue with the definitions. On this slide we have Pressure belt. Write each point on a new line, with the key term first, and explain it in your own words when we revise.</a:t>
             </a:r>
             <a:endParaRPr lang="en-US" dirty="0"/>
           </a:p>
@@ -3103,7 +3108,7 @@
           <a:p>
             <a:r>
               <a:rPr lang="en-US" dirty="0"/>
-              <a:t>Let us copy Pressure Belts and Winds. The main pressure belts and winds are the following. On this slide we have Pressure belts and Trade winds. Write each point on a new line, with the key term first, and explain it in your own words when we revise. When you finish, we go to the next slide.</a:t>
+              <a:t>Let us copy Types of Pressure. There are two types of pressure. Copy the point on Low pressure on the left, then draw the diagram on the right: hot air rises. Give it a title and label it clearly.</a:t>
             </a:r>
             <a:endParaRPr lang="en-US" dirty="0"/>
           </a:p>
@@ -3191,7 +3196,7 @@
           <a:p>
             <a:r>
               <a:rPr lang="en-US" dirty="0"/>
-              <a:t>We continue with Pressure Belts and Winds. On this slide we have Westerlies and Winds of Cameroon. Write each point on a new line, with the key term first, and explain it in your own words when we revise.</a:t>
+              <a:t>We continue with Types of Pressure. On this slide we have High pressure. Write each point on a new line, with the key term first, and explain it in your own words when we revise.</a:t>
             </a:r>
             <a:endParaRPr lang="en-US" dirty="0"/>
           </a:p>
@@ -3279,7 +3284,7 @@
           <a:p>
             <a:r>
               <a:rPr lang="en-US" dirty="0"/>
-              <a:t>Now draw this illustration in your notebook: pressure belts and planetary winds. Give it a title and label it clearly.</a:t>
+              <a:t>Copy the point on Measurement on the left, then draw the diagram on the right: a barometer. Give it a title and label it clearly.</a:t>
             </a:r>
             <a:endParaRPr lang="en-US" dirty="0"/>
           </a:p>
@@ -3367,7 +3372,7 @@
           <a:p>
             <a:r>
               <a:rPr lang="en-US" dirty="0"/>
-              <a:t>Now let us check what you have understood. Question 1: What is wind? Answer in your exercise book.</a:t>
+              <a:t>Let us copy Winds and Pressure Belts. The main pressure belts and winds are the following. Copy the point on Pressure belts on the left, then draw the diagram on the right: the pressure belts. Give it a title and label it clearly.</a:t>
             </a:r>
             <a:endParaRPr lang="en-US" dirty="0"/>
           </a:p>
@@ -3543,7 +3548,7 @@
           <a:p>
             <a:r>
               <a:rPr lang="en-US" dirty="0"/>
-              <a:t>The expected answer is: air moving from high to low pressure. If you got it right, well done.</a:t>
+              <a:t>Copy the point on Trade winds on the left, then draw the diagram on the right: the planetary winds. Give it a title and label it clearly.</a:t>
             </a:r>
             <a:endParaRPr lang="en-US" dirty="0"/>
           </a:p>
@@ -3631,7 +3636,7 @@
           <a:p>
             <a:r>
               <a:rPr lang="en-US" dirty="0"/>
-              <a:t>Now let us check what you have understood. Question 2: Name two winds that blow over Cameroon. Answer in your exercise book.</a:t>
+              <a:t>We continue with Winds and Pressure Belts. On this slide we have Westerlies and Polar easterlies. Write each point on a new line, with the key term first, and explain it in your own words when we revise.</a:t>
             </a:r>
             <a:endParaRPr lang="en-US" dirty="0"/>
           </a:p>
@@ -3719,7 +3724,7 @@
           <a:p>
             <a:r>
               <a:rPr lang="en-US" dirty="0"/>
-              <a:t>The expected answer is: the Harmattan and the south-west monsoon. If you got it right, well done.</a:t>
+              <a:t>Copy the point on Harmattan on the left, then draw the diagram on the right: a Harmattan sky. Give it a title and label it clearly.</a:t>
             </a:r>
             <a:endParaRPr lang="en-US" dirty="0"/>
           </a:p>
@@ -3807,7 +3812,7 @@
           <a:p>
             <a:r>
               <a:rPr lang="en-US" dirty="0"/>
-              <a:t>For those who need more practice, fill in the blanks in your exercise book. The answers are: number 1, barometer; number 2, low; number 3, Harmattan.</a:t>
+              <a:t>Copy the point on South-west monsoon on the left, then draw the diagram on the right: monsoon rain. Give it a title and label it clearly.</a:t>
             </a:r>
             <a:endParaRPr lang="en-US" dirty="0"/>
           </a:p>
@@ -3895,7 +3900,7 @@
           <a:p>
             <a:r>
               <a:rPr lang="en-US" dirty="0"/>
-              <a:t>For your homework: Observe the wind for three days and write its direction and whether it is dry or moist. We shall correct it at the beginning of our next lesson.</a:t>
+              <a:t>Now let us check what you have understood. Question 1: What is wind? Answer in your exercise book.</a:t>
             </a:r>
             <a:endParaRPr lang="en-US" dirty="0"/>
           </a:p>
@@ -3983,7 +3988,7 @@
           <a:p>
             <a:r>
               <a:rPr lang="en-US" dirty="0"/>
-              <a:t>Our next lesson will be on Lesson 9: Atmospheric Disturbances. Thank you for your attention, and see you next time.</a:t>
+              <a:t>The expected answer is: air moving from high to low pressure. If you got it right, well done.</a:t>
             </a:r>
             <a:endParaRPr lang="en-US" dirty="0"/>
           </a:p>
@@ -4071,7 +4076,7 @@
           <a:p>
             <a:r>
               <a:rPr lang="en-US" dirty="0"/>
-              <a:t>Let us play the bilingual game. I say a word in English, and you give me the French word. Then we do the reverse.</a:t>
+              <a:t>Now let us check what you have understood. Question 2: Name two winds that blow over Cameroon. Answer in your exercise book.</a:t>
             </a:r>
             <a:endParaRPr lang="en-US" dirty="0"/>
           </a:p>
@@ -4159,7 +4164,7 @@
           <a:p>
             <a:r>
               <a:rPr lang="en-US" dirty="0"/>
-              <a:t>I record this information in the official logbook of the class after the lesson.</a:t>
+              <a:t>The expected answer is: the Harmattan and the south-west monsoon. If you got it right, well done.</a:t>
             </a:r>
             <a:endParaRPr lang="en-US" dirty="0"/>
           </a:p>
@@ -4247,7 +4252,7 @@
           <a:p>
             <a:r>
               <a:rPr lang="en-US" dirty="0"/>
-              <a:t>I complete the second page of the logbook: the matter taught, the evaluation, the homework and the attendance.</a:t>
+              <a:t>For those who need more practice, fill in the blanks in your exercise book. The answers are: number 1, barometer; number 2, low; number 3, Harmattan.</a:t>
             </a:r>
             <a:endParaRPr lang="en-US" dirty="0"/>
           </a:p>
@@ -4335,7 +4340,7 @@
           <a:p>
             <a:r>
               <a:rPr lang="en-US" dirty="0"/>
-              <a:t>This slide is for me, the teacher: it gives the timing of the lesson and what to do if the projector is not available.</a:t>
+              <a:t>For your homework: Observe the wind for three days and write its direction and whether it is dry or moist. We shall correct it at the beginning of our next lesson.</a:t>
             </a:r>
             <a:endParaRPr lang="en-US" dirty="0"/>
           </a:p>
@@ -4511,7 +4516,7 @@
           <a:p>
             <a:r>
               <a:rPr lang="en-US" dirty="0"/>
-              <a:t>These are the references and picture credits used to prepare this lesson.</a:t>
+              <a:t>Our next lesson will be on Lesson 9: Atmospheric Disturbances. Thank you for your attention, and see you next time.</a:t>
             </a:r>
             <a:endParaRPr lang="en-US" dirty="0"/>
           </a:p>
@@ -4535,6 +4540,446 @@
             <a:fld id="{F7021451-1387-4CA6-816F-3879F97B5CBC}" type="slidenum">
               <a:rPr lang="en-US"/>
               <a:t>50</a:t>
+            </a:fld>
+            <a:endParaRPr lang="en-US"/>
+          </a:p>
+        </p:txBody>
+      </p:sp>
+    </p:spTree>
+    <p:extLst>
+      <p:ext uri="{BB962C8B-B14F-4D97-AF65-F5344CB8AC3E}">
+        <p14:creationId xmlns:p14="http://schemas.microsoft.com/office/powerpoint/2010/main" val="1024086991"/>
+      </p:ext>
+    </p:extLst>
+  </p:cSld>
+  <p:clrMapOvr>
+    <a:masterClrMapping/>
+  </p:clrMapOvr>
+</p:notes>
+</file>
+
+<file path=ppt/notesSlides/notesSlide51.xml><?xml version="1.0" encoding="utf-8"?>
+<p:notes xmlns:a="http://schemas.openxmlformats.org/drawingml/2006/main" xmlns:r="http://schemas.openxmlformats.org/officeDocument/2006/relationships" xmlns:p="http://schemas.openxmlformats.org/presentationml/2006/main">
+  <p:cSld>
+    <p:spTree>
+      <p:nvGrpSpPr>
+        <p:cNvPr id="1" name=""/>
+        <p:cNvGrpSpPr/>
+        <p:nvPr/>
+      </p:nvGrpSpPr>
+      <p:grpSpPr>
+        <a:xfrm>
+          <a:off x="0" y="0"/>
+          <a:ext cx="0" cy="0"/>
+          <a:chOff x="0" y="0"/>
+          <a:chExt cx="0" cy="0"/>
+        </a:xfrm>
+      </p:grpSpPr>
+      <p:sp>
+        <p:nvSpPr>
+          <p:cNvPr id="2" name="Slide Image Placeholder 1"/>
+          <p:cNvSpPr>
+            <a:spLocks noGrp="1" noRot="1" noChangeAspect="1"/>
+          </p:cNvSpPr>
+          <p:nvPr>
+            <p:ph type="sldImg"/>
+          </p:nvPr>
+        </p:nvSpPr>
+        <p:spPr/>
+      </p:sp>
+      <p:sp>
+        <p:nvSpPr>
+          <p:cNvPr id="3" name="Notes Placeholder 2"/>
+          <p:cNvSpPr>
+            <a:spLocks noGrp="1"/>
+          </p:cNvSpPr>
+          <p:nvPr>
+            <p:ph type="body" idx="1"/>
+          </p:nvPr>
+        </p:nvSpPr>
+        <p:spPr/>
+        <p:txBody>
+          <a:bodyPr/>
+          <a:lstStyle/>
+          <a:p>
+            <a:r>
+              <a:rPr lang="en-US" dirty="0"/>
+              <a:t>Let us play the bilingual game. I say a word in English, and you give me the French word. Then we do the reverse.</a:t>
+            </a:r>
+            <a:endParaRPr lang="en-US" dirty="0"/>
+          </a:p>
+        </p:txBody>
+      </p:sp>
+      <p:sp>
+        <p:nvSpPr>
+          <p:cNvPr id="4" name="Slide Number Placeholder 3"/>
+          <p:cNvSpPr>
+            <a:spLocks noGrp="1"/>
+          </p:cNvSpPr>
+          <p:nvPr>
+            <p:ph type="sldNum" sz="quarter" idx="10"/>
+          </p:nvPr>
+        </p:nvSpPr>
+        <p:spPr/>
+        <p:txBody>
+          <a:bodyPr/>
+          <a:lstStyle/>
+          <a:p>
+            <a:fld id="{F7021451-1387-4CA6-816F-3879F97B5CBC}" type="slidenum">
+              <a:rPr lang="en-US"/>
+              <a:t>51</a:t>
+            </a:fld>
+            <a:endParaRPr lang="en-US"/>
+          </a:p>
+        </p:txBody>
+      </p:sp>
+    </p:spTree>
+    <p:extLst>
+      <p:ext uri="{BB962C8B-B14F-4D97-AF65-F5344CB8AC3E}">
+        <p14:creationId xmlns:p14="http://schemas.microsoft.com/office/powerpoint/2010/main" val="1024086991"/>
+      </p:ext>
+    </p:extLst>
+  </p:cSld>
+  <p:clrMapOvr>
+    <a:masterClrMapping/>
+  </p:clrMapOvr>
+</p:notes>
+</file>
+
+<file path=ppt/notesSlides/notesSlide52.xml><?xml version="1.0" encoding="utf-8"?>
+<p:notes xmlns:a="http://schemas.openxmlformats.org/drawingml/2006/main" xmlns:r="http://schemas.openxmlformats.org/officeDocument/2006/relationships" xmlns:p="http://schemas.openxmlformats.org/presentationml/2006/main">
+  <p:cSld>
+    <p:spTree>
+      <p:nvGrpSpPr>
+        <p:cNvPr id="1" name=""/>
+        <p:cNvGrpSpPr/>
+        <p:nvPr/>
+      </p:nvGrpSpPr>
+      <p:grpSpPr>
+        <a:xfrm>
+          <a:off x="0" y="0"/>
+          <a:ext cx="0" cy="0"/>
+          <a:chOff x="0" y="0"/>
+          <a:chExt cx="0" cy="0"/>
+        </a:xfrm>
+      </p:grpSpPr>
+      <p:sp>
+        <p:nvSpPr>
+          <p:cNvPr id="2" name="Slide Image Placeholder 1"/>
+          <p:cNvSpPr>
+            <a:spLocks noGrp="1" noRot="1" noChangeAspect="1"/>
+          </p:cNvSpPr>
+          <p:nvPr>
+            <p:ph type="sldImg"/>
+          </p:nvPr>
+        </p:nvSpPr>
+        <p:spPr/>
+      </p:sp>
+      <p:sp>
+        <p:nvSpPr>
+          <p:cNvPr id="3" name="Notes Placeholder 2"/>
+          <p:cNvSpPr>
+            <a:spLocks noGrp="1"/>
+          </p:cNvSpPr>
+          <p:nvPr>
+            <p:ph type="body" idx="1"/>
+          </p:nvPr>
+        </p:nvSpPr>
+        <p:spPr/>
+        <p:txBody>
+          <a:bodyPr/>
+          <a:lstStyle/>
+          <a:p>
+            <a:r>
+              <a:rPr lang="en-US" dirty="0"/>
+              <a:t>I record this information in the official logbook of the class after the lesson.</a:t>
+            </a:r>
+            <a:endParaRPr lang="en-US" dirty="0"/>
+          </a:p>
+        </p:txBody>
+      </p:sp>
+      <p:sp>
+        <p:nvSpPr>
+          <p:cNvPr id="4" name="Slide Number Placeholder 3"/>
+          <p:cNvSpPr>
+            <a:spLocks noGrp="1"/>
+          </p:cNvSpPr>
+          <p:nvPr>
+            <p:ph type="sldNum" sz="quarter" idx="10"/>
+          </p:nvPr>
+        </p:nvSpPr>
+        <p:spPr/>
+        <p:txBody>
+          <a:bodyPr/>
+          <a:lstStyle/>
+          <a:p>
+            <a:fld id="{F7021451-1387-4CA6-816F-3879F97B5CBC}" type="slidenum">
+              <a:rPr lang="en-US"/>
+              <a:t>52</a:t>
+            </a:fld>
+            <a:endParaRPr lang="en-US"/>
+          </a:p>
+        </p:txBody>
+      </p:sp>
+    </p:spTree>
+    <p:extLst>
+      <p:ext uri="{BB962C8B-B14F-4D97-AF65-F5344CB8AC3E}">
+        <p14:creationId xmlns:p14="http://schemas.microsoft.com/office/powerpoint/2010/main" val="1024086991"/>
+      </p:ext>
+    </p:extLst>
+  </p:cSld>
+  <p:clrMapOvr>
+    <a:masterClrMapping/>
+  </p:clrMapOvr>
+</p:notes>
+</file>
+
+<file path=ppt/notesSlides/notesSlide53.xml><?xml version="1.0" encoding="utf-8"?>
+<p:notes xmlns:a="http://schemas.openxmlformats.org/drawingml/2006/main" xmlns:r="http://schemas.openxmlformats.org/officeDocument/2006/relationships" xmlns:p="http://schemas.openxmlformats.org/presentationml/2006/main">
+  <p:cSld>
+    <p:spTree>
+      <p:nvGrpSpPr>
+        <p:cNvPr id="1" name=""/>
+        <p:cNvGrpSpPr/>
+        <p:nvPr/>
+      </p:nvGrpSpPr>
+      <p:grpSpPr>
+        <a:xfrm>
+          <a:off x="0" y="0"/>
+          <a:ext cx="0" cy="0"/>
+          <a:chOff x="0" y="0"/>
+          <a:chExt cx="0" cy="0"/>
+        </a:xfrm>
+      </p:grpSpPr>
+      <p:sp>
+        <p:nvSpPr>
+          <p:cNvPr id="2" name="Slide Image Placeholder 1"/>
+          <p:cNvSpPr>
+            <a:spLocks noGrp="1" noRot="1" noChangeAspect="1"/>
+          </p:cNvSpPr>
+          <p:nvPr>
+            <p:ph type="sldImg"/>
+          </p:nvPr>
+        </p:nvSpPr>
+        <p:spPr/>
+      </p:sp>
+      <p:sp>
+        <p:nvSpPr>
+          <p:cNvPr id="3" name="Notes Placeholder 2"/>
+          <p:cNvSpPr>
+            <a:spLocks noGrp="1"/>
+          </p:cNvSpPr>
+          <p:nvPr>
+            <p:ph type="body" idx="1"/>
+          </p:nvPr>
+        </p:nvSpPr>
+        <p:spPr/>
+        <p:txBody>
+          <a:bodyPr/>
+          <a:lstStyle/>
+          <a:p>
+            <a:r>
+              <a:rPr lang="en-US" dirty="0"/>
+              <a:t>I complete the second page of the logbook: the matter taught, the evaluation, the homework and the attendance.</a:t>
+            </a:r>
+            <a:endParaRPr lang="en-US" dirty="0"/>
+          </a:p>
+        </p:txBody>
+      </p:sp>
+      <p:sp>
+        <p:nvSpPr>
+          <p:cNvPr id="4" name="Slide Number Placeholder 3"/>
+          <p:cNvSpPr>
+            <a:spLocks noGrp="1"/>
+          </p:cNvSpPr>
+          <p:nvPr>
+            <p:ph type="sldNum" sz="quarter" idx="10"/>
+          </p:nvPr>
+        </p:nvSpPr>
+        <p:spPr/>
+        <p:txBody>
+          <a:bodyPr/>
+          <a:lstStyle/>
+          <a:p>
+            <a:fld id="{F7021451-1387-4CA6-816F-3879F97B5CBC}" type="slidenum">
+              <a:rPr lang="en-US"/>
+              <a:t>53</a:t>
+            </a:fld>
+            <a:endParaRPr lang="en-US"/>
+          </a:p>
+        </p:txBody>
+      </p:sp>
+    </p:spTree>
+    <p:extLst>
+      <p:ext uri="{BB962C8B-B14F-4D97-AF65-F5344CB8AC3E}">
+        <p14:creationId xmlns:p14="http://schemas.microsoft.com/office/powerpoint/2010/main" val="1024086991"/>
+      </p:ext>
+    </p:extLst>
+  </p:cSld>
+  <p:clrMapOvr>
+    <a:masterClrMapping/>
+  </p:clrMapOvr>
+</p:notes>
+</file>
+
+<file path=ppt/notesSlides/notesSlide54.xml><?xml version="1.0" encoding="utf-8"?>
+<p:notes xmlns:a="http://schemas.openxmlformats.org/drawingml/2006/main" xmlns:r="http://schemas.openxmlformats.org/officeDocument/2006/relationships" xmlns:p="http://schemas.openxmlformats.org/presentationml/2006/main">
+  <p:cSld>
+    <p:spTree>
+      <p:nvGrpSpPr>
+        <p:cNvPr id="1" name=""/>
+        <p:cNvGrpSpPr/>
+        <p:nvPr/>
+      </p:nvGrpSpPr>
+      <p:grpSpPr>
+        <a:xfrm>
+          <a:off x="0" y="0"/>
+          <a:ext cx="0" cy="0"/>
+          <a:chOff x="0" y="0"/>
+          <a:chExt cx="0" cy="0"/>
+        </a:xfrm>
+      </p:grpSpPr>
+      <p:sp>
+        <p:nvSpPr>
+          <p:cNvPr id="2" name="Slide Image Placeholder 1"/>
+          <p:cNvSpPr>
+            <a:spLocks noGrp="1" noRot="1" noChangeAspect="1"/>
+          </p:cNvSpPr>
+          <p:nvPr>
+            <p:ph type="sldImg"/>
+          </p:nvPr>
+        </p:nvSpPr>
+        <p:spPr/>
+      </p:sp>
+      <p:sp>
+        <p:nvSpPr>
+          <p:cNvPr id="3" name="Notes Placeholder 2"/>
+          <p:cNvSpPr>
+            <a:spLocks noGrp="1"/>
+          </p:cNvSpPr>
+          <p:nvPr>
+            <p:ph type="body" idx="1"/>
+          </p:nvPr>
+        </p:nvSpPr>
+        <p:spPr/>
+        <p:txBody>
+          <a:bodyPr/>
+          <a:lstStyle/>
+          <a:p>
+            <a:r>
+              <a:rPr lang="en-US" dirty="0"/>
+              <a:t>This slide is for me, the teacher: it gives the timing of the lesson and what to do if the projector is not available.</a:t>
+            </a:r>
+            <a:endParaRPr lang="en-US" dirty="0"/>
+          </a:p>
+        </p:txBody>
+      </p:sp>
+      <p:sp>
+        <p:nvSpPr>
+          <p:cNvPr id="4" name="Slide Number Placeholder 3"/>
+          <p:cNvSpPr>
+            <a:spLocks noGrp="1"/>
+          </p:cNvSpPr>
+          <p:nvPr>
+            <p:ph type="sldNum" sz="quarter" idx="10"/>
+          </p:nvPr>
+        </p:nvSpPr>
+        <p:spPr/>
+        <p:txBody>
+          <a:bodyPr/>
+          <a:lstStyle/>
+          <a:p>
+            <a:fld id="{F7021451-1387-4CA6-816F-3879F97B5CBC}" type="slidenum">
+              <a:rPr lang="en-US"/>
+              <a:t>54</a:t>
+            </a:fld>
+            <a:endParaRPr lang="en-US"/>
+          </a:p>
+        </p:txBody>
+      </p:sp>
+    </p:spTree>
+    <p:extLst>
+      <p:ext uri="{BB962C8B-B14F-4D97-AF65-F5344CB8AC3E}">
+        <p14:creationId xmlns:p14="http://schemas.microsoft.com/office/powerpoint/2010/main" val="1024086991"/>
+      </p:ext>
+    </p:extLst>
+  </p:cSld>
+  <p:clrMapOvr>
+    <a:masterClrMapping/>
+  </p:clrMapOvr>
+</p:notes>
+</file>
+
+<file path=ppt/notesSlides/notesSlide55.xml><?xml version="1.0" encoding="utf-8"?>
+<p:notes xmlns:a="http://schemas.openxmlformats.org/drawingml/2006/main" xmlns:r="http://schemas.openxmlformats.org/officeDocument/2006/relationships" xmlns:p="http://schemas.openxmlformats.org/presentationml/2006/main">
+  <p:cSld>
+    <p:spTree>
+      <p:nvGrpSpPr>
+        <p:cNvPr id="1" name=""/>
+        <p:cNvGrpSpPr/>
+        <p:nvPr/>
+      </p:nvGrpSpPr>
+      <p:grpSpPr>
+        <a:xfrm>
+          <a:off x="0" y="0"/>
+          <a:ext cx="0" cy="0"/>
+          <a:chOff x="0" y="0"/>
+          <a:chExt cx="0" cy="0"/>
+        </a:xfrm>
+      </p:grpSpPr>
+      <p:sp>
+        <p:nvSpPr>
+          <p:cNvPr id="2" name="Slide Image Placeholder 1"/>
+          <p:cNvSpPr>
+            <a:spLocks noGrp="1" noRot="1" noChangeAspect="1"/>
+          </p:cNvSpPr>
+          <p:nvPr>
+            <p:ph type="sldImg"/>
+          </p:nvPr>
+        </p:nvSpPr>
+        <p:spPr/>
+      </p:sp>
+      <p:sp>
+        <p:nvSpPr>
+          <p:cNvPr id="3" name="Notes Placeholder 2"/>
+          <p:cNvSpPr>
+            <a:spLocks noGrp="1"/>
+          </p:cNvSpPr>
+          <p:nvPr>
+            <p:ph type="body" idx="1"/>
+          </p:nvPr>
+        </p:nvSpPr>
+        <p:spPr/>
+        <p:txBody>
+          <a:bodyPr/>
+          <a:lstStyle/>
+          <a:p>
+            <a:r>
+              <a:rPr lang="en-US" dirty="0"/>
+              <a:t>These are the references and picture credits used to prepare this lesson.</a:t>
+            </a:r>
+            <a:endParaRPr lang="en-US" dirty="0"/>
+          </a:p>
+        </p:txBody>
+      </p:sp>
+      <p:sp>
+        <p:nvSpPr>
+          <p:cNvPr id="4" name="Slide Number Placeholder 3"/>
+          <p:cNvSpPr>
+            <a:spLocks noGrp="1"/>
+          </p:cNvSpPr>
+          <p:nvPr>
+            <p:ph type="sldNum" sz="quarter" idx="10"/>
+          </p:nvPr>
+        </p:nvSpPr>
+        <p:spPr/>
+        <p:txBody>
+          <a:bodyPr/>
+          <a:lstStyle/>
+          <a:p>
+            <a:fld id="{F7021451-1387-4CA6-816F-3879F97B5CBC}" type="slidenum">
+              <a:rPr lang="en-US"/>
+              <a:t>55</a:t>
             </a:fld>
             <a:endParaRPr lang="en-US"/>
           </a:p>
@@ -4687,7 +5132,7 @@
           <a:p>
             <a:r>
               <a:rPr lang="en-US" dirty="0"/>
-              <a:t>By the end of this lesson, you should be able to do three things. Number 1: define atmospheric pressure. Number 2: distinguish high and low pressure. Number 3: describe the pressure belts and the planetary winds.</a:t>
+              <a:t>By the end of this lesson, you should be able to do three things. Number 1: define atmospheric pressure. Number 2: distinguish high and low pressure. Number 3: describe the pressure belts and the winds.</a:t>
             </a:r>
             <a:endParaRPr lang="en-US" dirty="0"/>
           </a:p>
@@ -4863,7 +5308,7 @@
           <a:p>
             <a:r>
               <a:rPr lang="en-US" dirty="0"/>
-              <a:t>Listen carefully to this situation from real life. In January, the Harmattan blows dust over Garoua from the north-east. In July, a moist wind from the south-west brings rain. Hadiza asks why the wind changes direction with the seasons. Think about it, because I am going to ask you some questions.</a:t>
+              <a:t>Listen carefully to this situation from real life. In January, the Harmattan blows dust over Garoua from the north-east. In July, a moist wind from the south-west brings rain. Hadiza asks her teacher: "Why does the wind change its direction with the seasons?" Think about it, because I am going to ask you some questions.</a:t>
             </a:r>
             <a:endParaRPr lang="en-US" dirty="0"/>
           </a:p>
@@ -6546,7 +6991,7 @@
                 <a:ea typeface="Times New Roman" pitchFamily="34" charset="-122"/>
                 <a:cs typeface="Times New Roman" pitchFamily="34" charset="-120"/>
               </a:rPr>
-              <a:t>Hadiza does not know why the wind changes direction.</a:t>
+              <a:t>Hadiza does not know why the wind changes its direction with the seasons.</a:t>
             </a:r>
             <a:endParaRPr lang="en-US" sz="4000" dirty="0"/>
           </a:p>
@@ -8074,7 +8519,7 @@
                 <a:ea typeface="Times New Roman" pitchFamily="34" charset="-122"/>
                 <a:cs typeface="Times New Roman" pitchFamily="34" charset="-120"/>
               </a:rPr>
-              <a:t>A barometer.</a:t>
+              <a:t>An instrument of the weather station.</a:t>
             </a:r>
             <a:endParaRPr lang="en-US" sz="1800" dirty="0"/>
           </a:p>
@@ -8293,7 +8738,7 @@
                 <a:ea typeface="Times New Roman" pitchFamily="34" charset="-122"/>
                 <a:cs typeface="Times New Roman" pitchFamily="34" charset="-120"/>
               </a:rPr>
-              <a:t>What does a barometer measure?</a:t>
+              <a:t>What does this instrument measure?</a:t>
             </a:r>
             <a:endParaRPr lang="en-US" sz="4000" dirty="0"/>
           </a:p>
@@ -9107,7 +9552,7 @@
                 <a:ea typeface="Times New Roman" pitchFamily="34" charset="-122"/>
                 <a:cs typeface="Times New Roman" pitchFamily="34" charset="-120"/>
               </a:rPr>
-              <a:t>Atmospheric pressure, the weight of the air.</a:t>
+              <a:t>The pressure of the air (atmospheric pressure): it is a barometer.</a:t>
             </a:r>
             <a:endParaRPr lang="en-US" sz="4000" dirty="0"/>
           </a:p>
@@ -9540,7 +9985,7 @@
                 <a:ea typeface="Times New Roman" pitchFamily="34" charset="-122"/>
                 <a:cs typeface="Times New Roman" pitchFamily="34" charset="-120"/>
               </a:rPr>
-              <a:t>Where is pressure low: where air rises or where air sinks?</a:t>
+              <a:t>What happens to air when it is heated?</a:t>
             </a:r>
             <a:endParaRPr lang="en-US" sz="4000" dirty="0"/>
           </a:p>
@@ -9759,7 +10204,7 @@
                 <a:ea typeface="Times New Roman" pitchFamily="34" charset="-122"/>
                 <a:cs typeface="Times New Roman" pitchFamily="34" charset="-120"/>
               </a:rPr>
-              <a:t>Pressure is low where hot air rises and high where cool air sinks.</a:t>
+              <a:t>It becomes light and rises, and the pressure below it becomes low.</a:t>
             </a:r>
             <a:endParaRPr lang="en-US" sz="4000" dirty="0"/>
           </a:p>
@@ -10192,7 +10637,7 @@
                 <a:ea typeface="Times New Roman" pitchFamily="34" charset="-122"/>
                 <a:cs typeface="Times New Roman" pitchFamily="34" charset="-120"/>
               </a:rPr>
-              <a:t>Wind blows from which pressure to which pressure?</a:t>
+              <a:t>From which type of pressure does the wind blow?</a:t>
             </a:r>
             <a:endParaRPr lang="en-US" sz="4000" dirty="0"/>
           </a:p>
@@ -10411,7 +10856,7 @@
                 <a:ea typeface="Times New Roman" pitchFamily="34" charset="-122"/>
                 <a:cs typeface="Times New Roman" pitchFamily="34" charset="-120"/>
               </a:rPr>
-              <a:t>From high pressure to low pressure.</a:t>
+              <a:t>From high pressure towards low pressure.</a:t>
             </a:r>
             <a:endParaRPr lang="en-US" sz="4000" dirty="0"/>
           </a:p>
@@ -10625,7 +11070,7 @@
                 <a:ea typeface="Times New Roman" pitchFamily="34" charset="-122"/>
                 <a:cs typeface="Times New Roman" pitchFamily="34" charset="-120"/>
               </a:rPr>
-              <a:t>Pressure belts and planetary winds.</a:t>
+              <a:t>Pressure belts and winds of the world.</a:t>
             </a:r>
             <a:endParaRPr lang="en-US" sz="1800" dirty="0"/>
           </a:p>
@@ -11746,7 +12191,7 @@
                           <a:ea typeface="Calibri" pitchFamily="34" charset="-122"/>
                           <a:cs typeface="Calibri" pitchFamily="34" charset="-120"/>
                         </a:rPr>
-                        <a:t>Pressure, high pressure, low pressure, wind, pressure belts, planetary winds.</a:t>
+                        <a:t>Pressure, high pressure, low pressure, wind, pressure belts.</a:t>
                       </a:r>
                       <a:endParaRPr lang="en-US" sz="1700" dirty="0">
                         <a:latin typeface="Calibri" charset="0"/>
@@ -11884,7 +12329,7 @@
                           <a:ea typeface="Calibri" pitchFamily="34" charset="-122"/>
                           <a:cs typeface="Calibri" pitchFamily="34" charset="-120"/>
                         </a:rPr>
-                        <a:t>Pressure; types of pressure (high and low); winds and pressure belts.</a:t>
+                        <a:t>Pressure; types of pressure (high and low pressure); winds and pressure belts.</a:t>
                       </a:r>
                       <a:endParaRPr lang="en-US" sz="1700" dirty="0">
                         <a:latin typeface="Calibri" charset="0"/>
@@ -12505,7 +12950,7 @@
                 <a:ea typeface="Times New Roman" pitchFamily="34" charset="-122"/>
                 <a:cs typeface="Times New Roman" pitchFamily="34" charset="-120"/>
               </a:rPr>
-              <a:t>Where does the Harmattan come from, and what does it bring?</a:t>
+              <a:t>What does the Harmattan bring to the north of Cameroon?</a:t>
             </a:r>
             <a:endParaRPr lang="en-US" sz="4000" dirty="0"/>
           </a:p>
@@ -12724,7 +13169,7 @@
                 <a:ea typeface="Times New Roman" pitchFamily="34" charset="-122"/>
                 <a:cs typeface="Times New Roman" pitchFamily="34" charset="-120"/>
               </a:rPr>
-              <a:t>From the Sahara in the north-east; it brings dry, dusty air.</a:t>
+              <a:t>Dry, dusty air from the Sahara.</a:t>
             </a:r>
             <a:endParaRPr lang="en-US" sz="4000" dirty="0"/>
           </a:p>
@@ -13411,7 +13856,7 @@
         <p:spPr>
           <a:xfrm>
             <a:off x="0" y="658368"/>
-            <a:ext cx="3840480" cy="5833872"/>
+            <a:ext cx="5120640" cy="5833872"/>
           </a:xfrm>
           <a:prstGeom prst="rect">
             <a:avLst/>
@@ -13426,8 +13871,8 @@
         </p:nvSpPr>
         <p:spPr>
           <a:xfrm>
-            <a:off x="4069080" y="1005840"/>
-            <a:ext cx="7802575" cy="731520"/>
+            <a:off x="5349240" y="1005840"/>
+            <a:ext cx="6522415" cy="731520"/>
           </a:xfrm>
           <a:prstGeom prst="rect">
             <a:avLst/>
@@ -13453,7 +13898,7 @@
                 <a:ea typeface="Times New Roman" pitchFamily="34" charset="-122"/>
                 <a:cs typeface="Times New Roman" pitchFamily="34" charset="-120"/>
               </a:rPr>
-              <a:t>1. Types of Pressure</a:t>
+              <a:t>DEFINITIONS (continued)</a:t>
             </a:r>
             <a:endParaRPr lang="en-US" sz="3600" dirty="0"/>
           </a:p>
@@ -13467,8 +13912,8 @@
         </p:nvSpPr>
         <p:spPr>
           <a:xfrm>
-            <a:off x="4069080" y="1783080"/>
-            <a:ext cx="7802575" cy="4663440"/>
+            <a:off x="5349240" y="1783080"/>
+            <a:ext cx="6522415" cy="4663440"/>
           </a:xfrm>
           <a:prstGeom prst="rect">
             <a:avLst/>
@@ -13487,7 +13932,7 @@
               <a:buNone/>
             </a:pPr>
             <a:r>
-              <a:rPr lang="en-US" sz="4000" i="1" dirty="0">
+              <a:rPr lang="en-US" sz="4000" b="1" dirty="0">
                 <a:solidFill>
                   <a:srgbClr val="111111"/>
                 </a:solidFill>
@@ -13495,11 +13940,8 @@
                 <a:ea typeface="Times New Roman" pitchFamily="34" charset="-122"/>
                 <a:cs typeface="Times New Roman" pitchFamily="34" charset="-120"/>
               </a:rPr>
-              <a:t>There are two types of pressure:</a:t>
-            </a:r>
-            <a:endParaRPr lang="en-US" sz="4000" dirty="0"/>
-          </a:p>
-          <a:p>
+              <a:t>Pressure belt: </a:t>
+            </a:r>
             <a:pPr algn="l" indent="0" marL="0">
               <a:spcAft>
                 <a:spcPts val="800"/>
@@ -13507,7 +13949,7 @@
               <a:buNone/>
             </a:pPr>
             <a:r>
-              <a:rPr lang="en-US" sz="4000" b="1" dirty="0">
+              <a:rPr lang="en-US" sz="4000" dirty="0">
                 <a:solidFill>
                   <a:srgbClr val="111111"/>
                 </a:solidFill>
@@ -13515,61 +13957,7 @@
                 <a:ea typeface="Times New Roman" pitchFamily="34" charset="-122"/>
                 <a:cs typeface="Times New Roman" pitchFamily="34" charset="-120"/>
               </a:rPr>
-              <a:t>Low pressure: </a:t>
-            </a:r>
-            <a:pPr algn="l" indent="0" marL="0">
-              <a:spcAft>
-                <a:spcPts val="800"/>
-              </a:spcAft>
-              <a:buNone/>
-            </a:pPr>
-            <a:r>
-              <a:rPr lang="en-US" sz="4000" dirty="0">
-                <a:solidFill>
-                  <a:srgbClr val="111111"/>
-                </a:solidFill>
-                <a:latin typeface="Times New Roman" pitchFamily="34" charset="0"/>
-                <a:ea typeface="Times New Roman" pitchFamily="34" charset="-122"/>
-                <a:cs typeface="Times New Roman" pitchFamily="34" charset="-120"/>
-              </a:rPr>
-              <a:t>It forms where hot air rises, as at the Equator.</a:t>
-            </a:r>
-            <a:endParaRPr lang="en-US" sz="4000" dirty="0"/>
-          </a:p>
-          <a:p>
-            <a:pPr algn="l" indent="0" marL="0">
-              <a:spcAft>
-                <a:spcPts val="800"/>
-              </a:spcAft>
-              <a:buNone/>
-            </a:pPr>
-            <a:r>
-              <a:rPr lang="en-US" sz="4000" b="1" dirty="0">
-                <a:solidFill>
-                  <a:srgbClr val="111111"/>
-                </a:solidFill>
-                <a:latin typeface="Times New Roman" pitchFamily="34" charset="0"/>
-                <a:ea typeface="Times New Roman" pitchFamily="34" charset="-122"/>
-                <a:cs typeface="Times New Roman" pitchFamily="34" charset="-120"/>
-              </a:rPr>
-              <a:t>High pressure: </a:t>
-            </a:r>
-            <a:pPr algn="l" indent="0" marL="0">
-              <a:spcAft>
-                <a:spcPts val="800"/>
-              </a:spcAft>
-              <a:buNone/>
-            </a:pPr>
-            <a:r>
-              <a:rPr lang="en-US" sz="4000" dirty="0">
-                <a:solidFill>
-                  <a:srgbClr val="111111"/>
-                </a:solidFill>
-                <a:latin typeface="Times New Roman" pitchFamily="34" charset="0"/>
-                <a:ea typeface="Times New Roman" pitchFamily="34" charset="-122"/>
-                <a:cs typeface="Times New Roman" pitchFamily="34" charset="-120"/>
-              </a:rPr>
-              <a:t>It forms where cool air sinks, as at the tropics and the poles.</a:t>
+              <a:t>It is a zone of high or low pressure around the Earth.</a:t>
             </a:r>
             <a:endParaRPr lang="en-US" sz="4000" dirty="0"/>
           </a:p>
@@ -13687,9 +14075,129 @@
           </a:p>
         </p:txBody>
       </p:sp>
+      <p:sp>
+        <p:nvSpPr>
+          <p:cNvPr id="3" name="Text 1"/>
+          <p:cNvSpPr/>
+          <p:nvPr/>
+        </p:nvSpPr>
+        <p:spPr>
+          <a:xfrm>
+            <a:off x="365760" y="1005840"/>
+            <a:ext cx="11460175" cy="731520"/>
+          </a:xfrm>
+          <a:prstGeom prst="rect">
+            <a:avLst/>
+          </a:prstGeom>
+          <a:noFill/>
+          <a:ln/>
+        </p:spPr>
+        <p:txBody>
+          <a:bodyPr wrap="square" lIns="0" tIns="0" rIns="0" bIns="0" rtlCol="0" anchor="ctr">
+            <a:normAutofit/>
+          </a:bodyPr>
+          <a:lstStyle/>
+          <a:p>
+            <a:pPr algn="ctr" indent="0" marL="0">
+              <a:buNone/>
+            </a:pPr>
+            <a:r>
+              <a:rPr lang="en-US" sz="3600" b="1" dirty="0">
+                <a:solidFill>
+                  <a:srgbClr val="990011"/>
+                </a:solidFill>
+                <a:latin typeface="Times New Roman" pitchFamily="34" charset="0"/>
+                <a:ea typeface="Times New Roman" pitchFamily="34" charset="-122"/>
+                <a:cs typeface="Times New Roman" pitchFamily="34" charset="-120"/>
+              </a:rPr>
+              <a:t>1. Types of Pressure</a:t>
+            </a:r>
+            <a:endParaRPr lang="en-US" sz="3600" dirty="0"/>
+          </a:p>
+        </p:txBody>
+      </p:sp>
+      <p:sp>
+        <p:nvSpPr>
+          <p:cNvPr id="4" name="Text 2"/>
+          <p:cNvSpPr/>
+          <p:nvPr/>
+        </p:nvSpPr>
+        <p:spPr>
+          <a:xfrm>
+            <a:off x="365760" y="1783080"/>
+            <a:ext cx="4846320" cy="4617720"/>
+          </a:xfrm>
+          <a:prstGeom prst="rect">
+            <a:avLst/>
+          </a:prstGeom>
+          <a:noFill/>
+          <a:ln/>
+        </p:spPr>
+        <p:txBody>
+          <a:bodyPr wrap="square" lIns="0" tIns="0" rIns="0" bIns="0" rtlCol="0" anchor="t"/>
+          <a:lstStyle/>
+          <a:p>
+            <a:pPr algn="l" indent="0" marL="0">
+              <a:spcAft>
+                <a:spcPts val="800"/>
+              </a:spcAft>
+              <a:buNone/>
+            </a:pPr>
+            <a:r>
+              <a:rPr lang="en-US" sz="3600" i="1" dirty="0">
+                <a:solidFill>
+                  <a:srgbClr val="111111"/>
+                </a:solidFill>
+                <a:latin typeface="Times New Roman" pitchFamily="34" charset="0"/>
+                <a:ea typeface="Times New Roman" pitchFamily="34" charset="-122"/>
+                <a:cs typeface="Times New Roman" pitchFamily="34" charset="-120"/>
+              </a:rPr>
+              <a:t>There are two types of pressure:</a:t>
+            </a:r>
+            <a:endParaRPr lang="en-US" sz="3600" dirty="0"/>
+          </a:p>
+          <a:p>
+            <a:pPr algn="l" indent="0" marL="0">
+              <a:spcAft>
+                <a:spcPts val="800"/>
+              </a:spcAft>
+              <a:buNone/>
+            </a:pPr>
+            <a:r>
+              <a:rPr lang="en-US" sz="3600" b="1" dirty="0">
+                <a:solidFill>
+                  <a:srgbClr val="111111"/>
+                </a:solidFill>
+                <a:latin typeface="Times New Roman" pitchFamily="34" charset="0"/>
+                <a:ea typeface="Times New Roman" pitchFamily="34" charset="-122"/>
+                <a:cs typeface="Times New Roman" pitchFamily="34" charset="-120"/>
+              </a:rPr>
+              <a:t>Low pressure: </a:t>
+            </a:r>
+            <a:pPr algn="l" indent="0" marL="0">
+              <a:spcAft>
+                <a:spcPts val="800"/>
+              </a:spcAft>
+              <a:buNone/>
+            </a:pPr>
+            <a:r>
+              <a:rPr lang="en-US" sz="3600" dirty="0">
+                <a:solidFill>
+                  <a:srgbClr val="111111"/>
+                </a:solidFill>
+                <a:latin typeface="Times New Roman" pitchFamily="34" charset="0"/>
+                <a:ea typeface="Times New Roman" pitchFamily="34" charset="-122"/>
+                <a:cs typeface="Times New Roman" pitchFamily="34" charset="-120"/>
+              </a:rPr>
+              <a:t>It forms where hot air rises, as at the Equator.</a:t>
+            </a:r>
+            <a:endParaRPr lang="en-US" sz="3600" dirty="0"/>
+          </a:p>
+        </p:txBody>
+      </p:sp>
       <p:pic>
         <p:nvPicPr>
-          <p:cNvPr id="3" name="Image 0" descr="/home/claude/f4/img/minesec_sheet.png">    </p:cNvPr>
+          <p:cNvPr id="5" name="Image 0" descr="/home/claude/f4/img/v2/convection_last.png">    </p:cNvPr>
           <p:cNvPicPr>
             <a:picLocks noChangeAspect="1"/>
           </p:cNvPicPr>
@@ -13703,8 +14211,8 @@
         </p:blipFill>
         <p:spPr>
           <a:xfrm>
-            <a:off x="0" y="658368"/>
-            <a:ext cx="2468880" cy="5833872"/>
+            <a:off x="5349240" y="2617506"/>
+            <a:ext cx="6659575" cy="2601397"/>
           </a:xfrm>
           <a:prstGeom prst="rect">
             <a:avLst/>
@@ -13713,14 +14221,14 @@
       </p:pic>
       <p:sp>
         <p:nvSpPr>
-          <p:cNvPr id="4" name="Text 1"/>
+          <p:cNvPr id="6" name="Text 3"/>
           <p:cNvSpPr/>
           <p:nvPr/>
         </p:nvSpPr>
         <p:spPr>
           <a:xfrm>
-            <a:off x="2697480" y="1005840"/>
-            <a:ext cx="9174175" cy="731520"/>
+            <a:off x="5349240" y="6089904"/>
+            <a:ext cx="6659575" cy="347472"/>
           </a:xfrm>
           <a:prstGeom prst="rect">
             <a:avLst/>
@@ -13729,142 +14237,24 @@
           <a:ln/>
         </p:spPr>
         <p:txBody>
-          <a:bodyPr wrap="square" lIns="0" tIns="0" rIns="0" bIns="0" rtlCol="0" anchor="ctr">
-            <a:normAutofit/>
-          </a:bodyPr>
+          <a:bodyPr wrap="square" lIns="0" tIns="0" rIns="0" bIns="0" rtlCol="0" anchor="ctr"/>
           <a:lstStyle/>
           <a:p>
             <a:pPr algn="ctr" indent="0" marL="0">
               <a:buNone/>
             </a:pPr>
             <a:r>
-              <a:rPr lang="en-US" sz="3600" b="1" dirty="0">
-                <a:solidFill>
-                  <a:srgbClr val="990011"/>
+              <a:rPr lang="en-US" sz="1600" i="1" dirty="0">
+                <a:solidFill>
+                  <a:srgbClr val="555555"/>
                 </a:solidFill>
                 <a:latin typeface="Times New Roman" pitchFamily="34" charset="0"/>
                 <a:ea typeface="Times New Roman" pitchFamily="34" charset="-122"/>
                 <a:cs typeface="Times New Roman" pitchFamily="34" charset="-120"/>
               </a:rPr>
-              <a:t>2. Pressure Belts and Winds</a:t>
-            </a:r>
-            <a:endParaRPr lang="en-US" sz="3600" dirty="0"/>
-          </a:p>
-        </p:txBody>
-      </p:sp>
-      <p:sp>
-        <p:nvSpPr>
-          <p:cNvPr id="5" name="Text 2"/>
-          <p:cNvSpPr/>
-          <p:nvPr/>
-        </p:nvSpPr>
-        <p:spPr>
-          <a:xfrm>
-            <a:off x="2697480" y="1783080"/>
-            <a:ext cx="9174175" cy="4663440"/>
-          </a:xfrm>
-          <a:prstGeom prst="rect">
-            <a:avLst/>
-          </a:prstGeom>
-          <a:noFill/>
-          <a:ln/>
-        </p:spPr>
-        <p:txBody>
-          <a:bodyPr wrap="square" lIns="0" tIns="0" rIns="0" bIns="0" rtlCol="0" anchor="t"/>
-          <a:lstStyle/>
-          <a:p>
-            <a:pPr algn="l" indent="0" marL="0">
-              <a:spcAft>
-                <a:spcPts val="800"/>
-              </a:spcAft>
-              <a:buNone/>
-            </a:pPr>
-            <a:r>
-              <a:rPr lang="en-US" sz="4000" i="1" dirty="0">
-                <a:solidFill>
-                  <a:srgbClr val="111111"/>
-                </a:solidFill>
-                <a:latin typeface="Times New Roman" pitchFamily="34" charset="0"/>
-                <a:ea typeface="Times New Roman" pitchFamily="34" charset="-122"/>
-                <a:cs typeface="Times New Roman" pitchFamily="34" charset="-120"/>
-              </a:rPr>
-              <a:t>The main pressure belts and winds are the following:</a:t>
-            </a:r>
-            <a:endParaRPr lang="en-US" sz="4000" dirty="0"/>
-          </a:p>
-          <a:p>
-            <a:pPr algn="l" indent="0" marL="0">
-              <a:spcAft>
-                <a:spcPts val="800"/>
-              </a:spcAft>
-              <a:buNone/>
-            </a:pPr>
-            <a:r>
-              <a:rPr lang="en-US" sz="4000" b="1" dirty="0">
-                <a:solidFill>
-                  <a:srgbClr val="111111"/>
-                </a:solidFill>
-                <a:latin typeface="Times New Roman" pitchFamily="34" charset="0"/>
-                <a:ea typeface="Times New Roman" pitchFamily="34" charset="-122"/>
-                <a:cs typeface="Times New Roman" pitchFamily="34" charset="-120"/>
-              </a:rPr>
-              <a:t>Pressure belts: </a:t>
-            </a:r>
-            <a:pPr algn="l" indent="0" marL="0">
-              <a:spcAft>
-                <a:spcPts val="800"/>
-              </a:spcAft>
-              <a:buNone/>
-            </a:pPr>
-            <a:r>
-              <a:rPr lang="en-US" sz="4000" dirty="0">
-                <a:solidFill>
-                  <a:srgbClr val="111111"/>
-                </a:solidFill>
-                <a:latin typeface="Times New Roman" pitchFamily="34" charset="0"/>
-                <a:ea typeface="Times New Roman" pitchFamily="34" charset="-122"/>
-                <a:cs typeface="Times New Roman" pitchFamily="34" charset="-120"/>
-              </a:rPr>
-              <a:t>The Equatorial Low, the Sub-tropical Highs, the Temperate Lows and the Polar Highs surround the Earth.</a:t>
-            </a:r>
-            <a:endParaRPr lang="en-US" sz="4000" dirty="0"/>
-          </a:p>
-          <a:p>
-            <a:pPr algn="l" indent="0" marL="0">
-              <a:spcAft>
-                <a:spcPts val="800"/>
-              </a:spcAft>
-              <a:buNone/>
-            </a:pPr>
-            <a:r>
-              <a:rPr lang="en-US" sz="4000" b="1" dirty="0">
-                <a:solidFill>
-                  <a:srgbClr val="111111"/>
-                </a:solidFill>
-                <a:latin typeface="Times New Roman" pitchFamily="34" charset="0"/>
-                <a:ea typeface="Times New Roman" pitchFamily="34" charset="-122"/>
-                <a:cs typeface="Times New Roman" pitchFamily="34" charset="-120"/>
-              </a:rPr>
-              <a:t>Trade winds: </a:t>
-            </a:r>
-            <a:pPr algn="l" indent="0" marL="0">
-              <a:spcAft>
-                <a:spcPts val="800"/>
-              </a:spcAft>
-              <a:buNone/>
-            </a:pPr>
-            <a:r>
-              <a:rPr lang="en-US" sz="4000" dirty="0">
-                <a:solidFill>
-                  <a:srgbClr val="111111"/>
-                </a:solidFill>
-                <a:latin typeface="Times New Roman" pitchFamily="34" charset="0"/>
-                <a:ea typeface="Times New Roman" pitchFamily="34" charset="-122"/>
-                <a:cs typeface="Times New Roman" pitchFamily="34" charset="-120"/>
-              </a:rPr>
-              <a:t>They blow from the sub-tropical highs towards the Equator.</a:t>
-            </a:r>
-            <a:endParaRPr lang="en-US" sz="4000" dirty="0"/>
+              <a:t>Illustration: hot air rises</a:t>
+            </a:r>
+            <a:endParaRPr lang="en-US" sz="1600" dirty="0"/>
           </a:p>
         </p:txBody>
       </p:sp>
@@ -13997,7 +14387,7 @@
         <p:spPr>
           <a:xfrm>
             <a:off x="0" y="658368"/>
-            <a:ext cx="3840480" cy="5833872"/>
+            <a:ext cx="5120640" cy="5833872"/>
           </a:xfrm>
           <a:prstGeom prst="rect">
             <a:avLst/>
@@ -14012,8 +14402,8 @@
         </p:nvSpPr>
         <p:spPr>
           <a:xfrm>
-            <a:off x="4069080" y="1005840"/>
-            <a:ext cx="7802575" cy="731520"/>
+            <a:off x="5349240" y="1005840"/>
+            <a:ext cx="6522415" cy="731520"/>
           </a:xfrm>
           <a:prstGeom prst="rect">
             <a:avLst/>
@@ -14039,7 +14429,7 @@
                 <a:ea typeface="Times New Roman" pitchFamily="34" charset="-122"/>
                 <a:cs typeface="Times New Roman" pitchFamily="34" charset="-120"/>
               </a:rPr>
-              <a:t>2. Pressure Belts and Winds (continued)</a:t>
+              <a:t>1. Types of Pressure</a:t>
             </a:r>
             <a:endParaRPr lang="en-US" sz="3600" dirty="0"/>
           </a:p>
@@ -14053,8 +14443,8 @@
         </p:nvSpPr>
         <p:spPr>
           <a:xfrm>
-            <a:off x="4069080" y="1783080"/>
-            <a:ext cx="7802575" cy="4663440"/>
+            <a:off x="5349240" y="1783080"/>
+            <a:ext cx="6522415" cy="4663440"/>
           </a:xfrm>
           <a:prstGeom prst="rect">
             <a:avLst/>
@@ -14081,7 +14471,7 @@
                 <a:ea typeface="Times New Roman" pitchFamily="34" charset="-122"/>
                 <a:cs typeface="Times New Roman" pitchFamily="34" charset="-120"/>
               </a:rPr>
-              <a:t>Westerlies: </a:t>
+              <a:t>High pressure: </a:t>
             </a:r>
             <a:pPr algn="l" indent="0" marL="0">
               <a:spcAft>
@@ -14098,44 +14488,7 @@
                 <a:ea typeface="Times New Roman" pitchFamily="34" charset="-122"/>
                 <a:cs typeface="Times New Roman" pitchFamily="34" charset="-120"/>
               </a:rPr>
-              <a:t>They blow from the sub-tropical highs towards the temperate lows.</a:t>
-            </a:r>
-            <a:endParaRPr lang="en-US" sz="4000" dirty="0"/>
-          </a:p>
-          <a:p>
-            <a:pPr algn="l" indent="0" marL="0">
-              <a:spcAft>
-                <a:spcPts val="800"/>
-              </a:spcAft>
-              <a:buNone/>
-            </a:pPr>
-            <a:r>
-              <a:rPr lang="en-US" sz="4000" b="1" dirty="0">
-                <a:solidFill>
-                  <a:srgbClr val="111111"/>
-                </a:solidFill>
-                <a:latin typeface="Times New Roman" pitchFamily="34" charset="0"/>
-                <a:ea typeface="Times New Roman" pitchFamily="34" charset="-122"/>
-                <a:cs typeface="Times New Roman" pitchFamily="34" charset="-120"/>
-              </a:rPr>
-              <a:t>Winds of Cameroon: </a:t>
-            </a:r>
-            <a:pPr algn="l" indent="0" marL="0">
-              <a:spcAft>
-                <a:spcPts val="800"/>
-              </a:spcAft>
-              <a:buNone/>
-            </a:pPr>
-            <a:r>
-              <a:rPr lang="en-US" sz="4000" dirty="0">
-                <a:solidFill>
-                  <a:srgbClr val="111111"/>
-                </a:solidFill>
-                <a:latin typeface="Times New Roman" pitchFamily="34" charset="0"/>
-                <a:ea typeface="Times New Roman" pitchFamily="34" charset="-122"/>
-                <a:cs typeface="Times New Roman" pitchFamily="34" charset="-120"/>
-              </a:rPr>
-              <a:t>The dry Harmattan blows in the dry season and the moist south-west monsoon brings rain.</a:t>
+              <a:t>It forms where cool air sinks, as at the tropics and the poles.</a:t>
             </a:r>
             <a:endParaRPr lang="en-US" sz="4000" dirty="0"/>
           </a:p>
@@ -14261,8 +14614,8 @@
         </p:nvSpPr>
         <p:spPr>
           <a:xfrm>
-            <a:off x="457200" y="1005840"/>
-            <a:ext cx="11277295" cy="731520"/>
+            <a:off x="365760" y="1005840"/>
+            <a:ext cx="11460175" cy="731520"/>
           </a:xfrm>
           <a:prstGeom prst="rect">
             <a:avLst/>
@@ -14271,7 +14624,9 @@
           <a:ln/>
         </p:spPr>
         <p:txBody>
-          <a:bodyPr wrap="square" lIns="0" tIns="0" rIns="0" bIns="0" rtlCol="0" anchor="ctr"/>
+          <a:bodyPr wrap="square" lIns="0" tIns="0" rIns="0" bIns="0" rtlCol="0" anchor="ctr">
+            <a:normAutofit/>
+          </a:bodyPr>
           <a:lstStyle/>
           <a:p>
             <a:pPr algn="ctr" indent="0" marL="0">
@@ -14286,7 +14641,66 @@
                 <a:ea typeface="Times New Roman" pitchFamily="34" charset="-122"/>
                 <a:cs typeface="Times New Roman" pitchFamily="34" charset="-120"/>
               </a:rPr>
-              <a:t>2. Pressure Belts and Winds</a:t>
+              <a:t>1. Types of Pressure</a:t>
+            </a:r>
+            <a:endParaRPr lang="en-US" sz="3600" dirty="0"/>
+          </a:p>
+        </p:txBody>
+      </p:sp>
+      <p:sp>
+        <p:nvSpPr>
+          <p:cNvPr id="4" name="Text 2"/>
+          <p:cNvSpPr/>
+          <p:nvPr/>
+        </p:nvSpPr>
+        <p:spPr>
+          <a:xfrm>
+            <a:off x="365760" y="1783080"/>
+            <a:ext cx="4846320" cy="4617720"/>
+          </a:xfrm>
+          <a:prstGeom prst="rect">
+            <a:avLst/>
+          </a:prstGeom>
+          <a:noFill/>
+          <a:ln/>
+        </p:spPr>
+        <p:txBody>
+          <a:bodyPr wrap="square" lIns="0" tIns="0" rIns="0" bIns="0" rtlCol="0" anchor="t"/>
+          <a:lstStyle/>
+          <a:p>
+            <a:pPr algn="l" indent="0" marL="0">
+              <a:spcAft>
+                <a:spcPts val="800"/>
+              </a:spcAft>
+              <a:buNone/>
+            </a:pPr>
+            <a:r>
+              <a:rPr lang="en-US" sz="3600" b="1" dirty="0">
+                <a:solidFill>
+                  <a:srgbClr val="111111"/>
+                </a:solidFill>
+                <a:latin typeface="Times New Roman" pitchFamily="34" charset="0"/>
+                <a:ea typeface="Times New Roman" pitchFamily="34" charset="-122"/>
+                <a:cs typeface="Times New Roman" pitchFamily="34" charset="-120"/>
+              </a:rPr>
+              <a:t>Measurement: </a:t>
+            </a:r>
+            <a:pPr algn="l" indent="0" marL="0">
+              <a:spcAft>
+                <a:spcPts val="800"/>
+              </a:spcAft>
+              <a:buNone/>
+            </a:pPr>
+            <a:r>
+              <a:rPr lang="en-US" sz="3600" dirty="0">
+                <a:solidFill>
+                  <a:srgbClr val="111111"/>
+                </a:solidFill>
+                <a:latin typeface="Times New Roman" pitchFamily="34" charset="0"/>
+                <a:ea typeface="Times New Roman" pitchFamily="34" charset="-122"/>
+                <a:cs typeface="Times New Roman" pitchFamily="34" charset="-120"/>
+              </a:rPr>
+              <a:t>Pressure is measured with a barometer, in millibars.</a:t>
             </a:r>
             <a:endParaRPr lang="en-US" sz="3600" dirty="0"/>
           </a:p>
@@ -14294,7 +14708,7 @@
       </p:sp>
       <p:pic>
         <p:nvPicPr>
-          <p:cNvPr id="4" name="Image 0" descr="/home/claude/f4/img/v2/pressure_belts_big.png">    </p:cNvPr>
+          <p:cNvPr id="5" name="Image 0" descr="/home/claude/f4/img/v2/f4_barometer.jpg">    </p:cNvPr>
           <p:cNvPicPr>
             <a:picLocks noChangeAspect="1"/>
           </p:cNvPicPr>
@@ -14308,8 +14722,8 @@
         </p:blipFill>
         <p:spPr>
           <a:xfrm>
-            <a:off x="629930" y="1783080"/>
-            <a:ext cx="10931835" cy="4270248"/>
+            <a:off x="5349240" y="2069045"/>
+            <a:ext cx="6659575" cy="3698319"/>
           </a:xfrm>
           <a:prstGeom prst="rect">
             <a:avLst/>
@@ -14318,14 +14732,14 @@
       </p:pic>
       <p:sp>
         <p:nvSpPr>
-          <p:cNvPr id="5" name="Text 2"/>
+          <p:cNvPr id="6" name="Text 3"/>
           <p:cNvSpPr/>
           <p:nvPr/>
         </p:nvSpPr>
         <p:spPr>
           <a:xfrm>
-            <a:off x="457200" y="6089904"/>
-            <a:ext cx="11277295" cy="347472"/>
+            <a:off x="5349240" y="6089904"/>
+            <a:ext cx="6659575" cy="347472"/>
           </a:xfrm>
           <a:prstGeom prst="rect">
             <a:avLst/>
@@ -14341,7 +14755,7 @@
               <a:buNone/>
             </a:pPr>
             <a:r>
-              <a:rPr lang="en-US" sz="1800" i="1" dirty="0">
+              <a:rPr lang="en-US" sz="1600" i="1" dirty="0">
                 <a:solidFill>
                   <a:srgbClr val="555555"/>
                 </a:solidFill>
@@ -14349,9 +14763,9 @@
                 <a:ea typeface="Times New Roman" pitchFamily="34" charset="-122"/>
                 <a:cs typeface="Times New Roman" pitchFamily="34" charset="-120"/>
               </a:rPr>
-              <a:t>Illustration: pressure belts and planetary winds</a:t>
-            </a:r>
-            <a:endParaRPr lang="en-US" sz="1800" dirty="0"/>
+              <a:t>Illustration: a barometer</a:t>
+            </a:r>
+            <a:endParaRPr lang="en-US" sz="1600" dirty="0"/>
           </a:p>
         </p:txBody>
       </p:sp>
@@ -14461,15 +14875,135 @@
                 <a:ea typeface="Calibri" pitchFamily="34" charset="-122"/>
                 <a:cs typeface="Calibri" pitchFamily="34" charset="-120"/>
               </a:rPr>
-              <a:t>FORMATIVE EVALUATION</a:t>
+              <a:t>BOARD SUMMARY</a:t>
             </a:r>
             <a:endParaRPr lang="en-US" sz="1400" dirty="0"/>
+          </a:p>
+        </p:txBody>
+      </p:sp>
+      <p:sp>
+        <p:nvSpPr>
+          <p:cNvPr id="3" name="Text 1"/>
+          <p:cNvSpPr/>
+          <p:nvPr/>
+        </p:nvSpPr>
+        <p:spPr>
+          <a:xfrm>
+            <a:off x="365760" y="1005840"/>
+            <a:ext cx="11460175" cy="731520"/>
+          </a:xfrm>
+          <a:prstGeom prst="rect">
+            <a:avLst/>
+          </a:prstGeom>
+          <a:noFill/>
+          <a:ln/>
+        </p:spPr>
+        <p:txBody>
+          <a:bodyPr wrap="square" lIns="0" tIns="0" rIns="0" bIns="0" rtlCol="0" anchor="ctr">
+            <a:normAutofit/>
+          </a:bodyPr>
+          <a:lstStyle/>
+          <a:p>
+            <a:pPr algn="ctr" indent="0" marL="0">
+              <a:buNone/>
+            </a:pPr>
+            <a:r>
+              <a:rPr lang="en-US" sz="3600" b="1" dirty="0">
+                <a:solidFill>
+                  <a:srgbClr val="990011"/>
+                </a:solidFill>
+                <a:latin typeface="Times New Roman" pitchFamily="34" charset="0"/>
+                <a:ea typeface="Times New Roman" pitchFamily="34" charset="-122"/>
+                <a:cs typeface="Times New Roman" pitchFamily="34" charset="-120"/>
+              </a:rPr>
+              <a:t>2. Winds and Pressure Belts</a:t>
+            </a:r>
+            <a:endParaRPr lang="en-US" sz="3600" dirty="0"/>
+          </a:p>
+        </p:txBody>
+      </p:sp>
+      <p:sp>
+        <p:nvSpPr>
+          <p:cNvPr id="4" name="Text 2"/>
+          <p:cNvSpPr/>
+          <p:nvPr/>
+        </p:nvSpPr>
+        <p:spPr>
+          <a:xfrm>
+            <a:off x="365760" y="1783080"/>
+            <a:ext cx="4846320" cy="4617720"/>
+          </a:xfrm>
+          <a:prstGeom prst="rect">
+            <a:avLst/>
+          </a:prstGeom>
+          <a:noFill/>
+          <a:ln/>
+        </p:spPr>
+        <p:txBody>
+          <a:bodyPr wrap="square" lIns="0" tIns="0" rIns="0" bIns="0" rtlCol="0" anchor="t"/>
+          <a:lstStyle/>
+          <a:p>
+            <a:pPr algn="l" indent="0" marL="0">
+              <a:spcAft>
+                <a:spcPts val="800"/>
+              </a:spcAft>
+              <a:buNone/>
+            </a:pPr>
+            <a:r>
+              <a:rPr lang="en-US" sz="3200" i="1" dirty="0">
+                <a:solidFill>
+                  <a:srgbClr val="111111"/>
+                </a:solidFill>
+                <a:latin typeface="Times New Roman" pitchFamily="34" charset="0"/>
+                <a:ea typeface="Times New Roman" pitchFamily="34" charset="-122"/>
+                <a:cs typeface="Times New Roman" pitchFamily="34" charset="-120"/>
+              </a:rPr>
+              <a:t>The main pressure belts and winds are the following:</a:t>
+            </a:r>
+            <a:endParaRPr lang="en-US" sz="3200" dirty="0"/>
+          </a:p>
+          <a:p>
+            <a:pPr algn="l" indent="0" marL="0">
+              <a:spcAft>
+                <a:spcPts val="800"/>
+              </a:spcAft>
+              <a:buNone/>
+            </a:pPr>
+            <a:r>
+              <a:rPr lang="en-US" sz="3200" b="1" dirty="0">
+                <a:solidFill>
+                  <a:srgbClr val="111111"/>
+                </a:solidFill>
+                <a:latin typeface="Times New Roman" pitchFamily="34" charset="0"/>
+                <a:ea typeface="Times New Roman" pitchFamily="34" charset="-122"/>
+                <a:cs typeface="Times New Roman" pitchFamily="34" charset="-120"/>
+              </a:rPr>
+              <a:t>Pressure belts: </a:t>
+            </a:r>
+            <a:pPr algn="l" indent="0" marL="0">
+              <a:spcAft>
+                <a:spcPts val="800"/>
+              </a:spcAft>
+              <a:buNone/>
+            </a:pPr>
+            <a:r>
+              <a:rPr lang="en-US" sz="3200" dirty="0">
+                <a:solidFill>
+                  <a:srgbClr val="111111"/>
+                </a:solidFill>
+                <a:latin typeface="Times New Roman" pitchFamily="34" charset="0"/>
+                <a:ea typeface="Times New Roman" pitchFamily="34" charset="-122"/>
+                <a:cs typeface="Times New Roman" pitchFamily="34" charset="-120"/>
+              </a:rPr>
+              <a:t>The Equatorial Low, the Subtropical Highs, the Temperate Lows and the Polar Highs surround the Earth.</a:t>
+            </a:r>
+            <a:endParaRPr lang="en-US" sz="3200" dirty="0"/>
           </a:p>
         </p:txBody>
       </p:sp>
       <p:pic>
         <p:nvPicPr>
-          <p:cNvPr id="3" name="Image 0" descr="/home/claude/f4/img/minesec_sheet.png">    </p:cNvPr>
+          <p:cNvPr id="5" name="Image 0" descr="/home/claude/f4/img/v2/pressure_belts_big.png">    </p:cNvPr>
           <p:cNvPicPr>
             <a:picLocks noChangeAspect="1"/>
           </p:cNvPicPr>
@@ -14483,8 +15017,8 @@
         </p:blipFill>
         <p:spPr>
           <a:xfrm>
-            <a:off x="0" y="658368"/>
-            <a:ext cx="5120640" cy="5833872"/>
+            <a:off x="5349240" y="2617506"/>
+            <a:ext cx="6659575" cy="2601397"/>
           </a:xfrm>
           <a:prstGeom prst="rect">
             <a:avLst/>
@@ -14493,14 +15027,14 @@
       </p:pic>
       <p:sp>
         <p:nvSpPr>
-          <p:cNvPr id="4" name="Text 1"/>
+          <p:cNvPr id="6" name="Text 3"/>
           <p:cNvSpPr/>
           <p:nvPr/>
         </p:nvSpPr>
         <p:spPr>
           <a:xfrm>
-            <a:off x="5349240" y="1005840"/>
-            <a:ext cx="6522415" cy="731520"/>
+            <a:off x="5349240" y="6089904"/>
+            <a:ext cx="6659575" cy="347472"/>
           </a:xfrm>
           <a:prstGeom prst="rect">
             <a:avLst/>
@@ -14509,68 +15043,24 @@
           <a:ln/>
         </p:spPr>
         <p:txBody>
-          <a:bodyPr wrap="square" lIns="0" tIns="0" rIns="0" bIns="0" rtlCol="0" anchor="ctr">
-            <a:normAutofit/>
-          </a:bodyPr>
+          <a:bodyPr wrap="square" lIns="0" tIns="0" rIns="0" bIns="0" rtlCol="0" anchor="ctr"/>
           <a:lstStyle/>
           <a:p>
             <a:pPr algn="ctr" indent="0" marL="0">
               <a:buNone/>
             </a:pPr>
             <a:r>
-              <a:rPr lang="en-US" sz="3600" b="1" dirty="0">
-                <a:solidFill>
-                  <a:srgbClr val="990011"/>
+              <a:rPr lang="en-US" sz="1600" i="1" dirty="0">
+                <a:solidFill>
+                  <a:srgbClr val="555555"/>
                 </a:solidFill>
                 <a:latin typeface="Times New Roman" pitchFamily="34" charset="0"/>
                 <a:ea typeface="Times New Roman" pitchFamily="34" charset="-122"/>
                 <a:cs typeface="Times New Roman" pitchFamily="34" charset="-120"/>
               </a:rPr>
-              <a:t>Evaluation 1</a:t>
-            </a:r>
-            <a:endParaRPr lang="en-US" sz="3600" dirty="0"/>
-          </a:p>
-        </p:txBody>
-      </p:sp>
-      <p:sp>
-        <p:nvSpPr>
-          <p:cNvPr id="5" name="Text 2"/>
-          <p:cNvSpPr/>
-          <p:nvPr/>
-        </p:nvSpPr>
-        <p:spPr>
-          <a:xfrm>
-            <a:off x="5349240" y="1783080"/>
-            <a:ext cx="6522415" cy="4663440"/>
-          </a:xfrm>
-          <a:prstGeom prst="rect">
-            <a:avLst/>
-          </a:prstGeom>
-          <a:noFill/>
-          <a:ln/>
-        </p:spPr>
-        <p:txBody>
-          <a:bodyPr wrap="square" lIns="0" tIns="0" rIns="0" bIns="0" rtlCol="0" anchor="t"/>
-          <a:lstStyle/>
-          <a:p>
-            <a:pPr algn="l" indent="0" marL="0">
-              <a:spcAft>
-                <a:spcPts val="800"/>
-              </a:spcAft>
-              <a:buNone/>
-            </a:pPr>
-            <a:r>
-              <a:rPr lang="en-US" sz="4000" dirty="0">
-                <a:solidFill>
-                  <a:srgbClr val="111111"/>
-                </a:solidFill>
-                <a:latin typeface="Times New Roman" pitchFamily="34" charset="0"/>
-                <a:ea typeface="Times New Roman" pitchFamily="34" charset="-122"/>
-                <a:cs typeface="Times New Roman" pitchFamily="34" charset="-120"/>
-              </a:rPr>
-              <a:t>What is wind?</a:t>
-            </a:r>
-            <a:endParaRPr lang="en-US" sz="4000" dirty="0"/>
+              <a:t>Illustration: the pressure belts</a:t>
+            </a:r>
+            <a:endParaRPr lang="en-US" sz="1600" dirty="0"/>
           </a:p>
         </p:txBody>
       </p:sp>
@@ -14919,15 +15409,115 @@
                 <a:ea typeface="Calibri" pitchFamily="34" charset="-122"/>
                 <a:cs typeface="Calibri" pitchFamily="34" charset="-120"/>
               </a:rPr>
-              <a:t>FORMATIVE EVALUATION</a:t>
+              <a:t>BOARD SUMMARY</a:t>
             </a:r>
             <a:endParaRPr lang="en-US" sz="1400" dirty="0"/>
+          </a:p>
+        </p:txBody>
+      </p:sp>
+      <p:sp>
+        <p:nvSpPr>
+          <p:cNvPr id="3" name="Text 1"/>
+          <p:cNvSpPr/>
+          <p:nvPr/>
+        </p:nvSpPr>
+        <p:spPr>
+          <a:xfrm>
+            <a:off x="365760" y="1005840"/>
+            <a:ext cx="11460175" cy="731520"/>
+          </a:xfrm>
+          <a:prstGeom prst="rect">
+            <a:avLst/>
+          </a:prstGeom>
+          <a:noFill/>
+          <a:ln/>
+        </p:spPr>
+        <p:txBody>
+          <a:bodyPr wrap="square" lIns="0" tIns="0" rIns="0" bIns="0" rtlCol="0" anchor="ctr">
+            <a:normAutofit/>
+          </a:bodyPr>
+          <a:lstStyle/>
+          <a:p>
+            <a:pPr algn="ctr" indent="0" marL="0">
+              <a:buNone/>
+            </a:pPr>
+            <a:r>
+              <a:rPr lang="en-US" sz="3600" b="1" dirty="0">
+                <a:solidFill>
+                  <a:srgbClr val="990011"/>
+                </a:solidFill>
+                <a:latin typeface="Times New Roman" pitchFamily="34" charset="0"/>
+                <a:ea typeface="Times New Roman" pitchFamily="34" charset="-122"/>
+                <a:cs typeface="Times New Roman" pitchFamily="34" charset="-120"/>
+              </a:rPr>
+              <a:t>2. Winds and Pressure Belts</a:t>
+            </a:r>
+            <a:endParaRPr lang="en-US" sz="3600" dirty="0"/>
+          </a:p>
+        </p:txBody>
+      </p:sp>
+      <p:sp>
+        <p:nvSpPr>
+          <p:cNvPr id="4" name="Text 2"/>
+          <p:cNvSpPr/>
+          <p:nvPr/>
+        </p:nvSpPr>
+        <p:spPr>
+          <a:xfrm>
+            <a:off x="365760" y="1783080"/>
+            <a:ext cx="4846320" cy="4617720"/>
+          </a:xfrm>
+          <a:prstGeom prst="rect">
+            <a:avLst/>
+          </a:prstGeom>
+          <a:noFill/>
+          <a:ln/>
+        </p:spPr>
+        <p:txBody>
+          <a:bodyPr wrap="square" lIns="0" tIns="0" rIns="0" bIns="0" rtlCol="0" anchor="t"/>
+          <a:lstStyle/>
+          <a:p>
+            <a:pPr algn="l" indent="0" marL="0">
+              <a:spcAft>
+                <a:spcPts val="800"/>
+              </a:spcAft>
+              <a:buNone/>
+            </a:pPr>
+            <a:r>
+              <a:rPr lang="en-US" sz="3600" b="1" dirty="0">
+                <a:solidFill>
+                  <a:srgbClr val="111111"/>
+                </a:solidFill>
+                <a:latin typeface="Times New Roman" pitchFamily="34" charset="0"/>
+                <a:ea typeface="Times New Roman" pitchFamily="34" charset="-122"/>
+                <a:cs typeface="Times New Roman" pitchFamily="34" charset="-120"/>
+              </a:rPr>
+              <a:t>Trade winds: </a:t>
+            </a:r>
+            <a:pPr algn="l" indent="0" marL="0">
+              <a:spcAft>
+                <a:spcPts val="800"/>
+              </a:spcAft>
+              <a:buNone/>
+            </a:pPr>
+            <a:r>
+              <a:rPr lang="en-US" sz="3600" dirty="0">
+                <a:solidFill>
+                  <a:srgbClr val="111111"/>
+                </a:solidFill>
+                <a:latin typeface="Times New Roman" pitchFamily="34" charset="0"/>
+                <a:ea typeface="Times New Roman" pitchFamily="34" charset="-122"/>
+                <a:cs typeface="Times New Roman" pitchFamily="34" charset="-120"/>
+              </a:rPr>
+              <a:t>They blow from the Subtropical Highs towards the Equator.</a:t>
+            </a:r>
+            <a:endParaRPr lang="en-US" sz="3600" dirty="0"/>
           </a:p>
         </p:txBody>
       </p:sp>
       <p:pic>
         <p:nvPicPr>
-          <p:cNvPr id="3" name="Image 0" descr="/home/claude/f4/img/minesec_sheet.png">    </p:cNvPr>
+          <p:cNvPr id="5" name="Image 0" descr="/home/claude/f4/img/v2/planetary_winds_big.png">    </p:cNvPr>
           <p:cNvPicPr>
             <a:picLocks noChangeAspect="1"/>
           </p:cNvPicPr>
@@ -14941,8 +15531,8 @@
         </p:blipFill>
         <p:spPr>
           <a:xfrm>
-            <a:off x="0" y="658368"/>
-            <a:ext cx="5120640" cy="5833872"/>
+            <a:off x="5349240" y="2617506"/>
+            <a:ext cx="6659575" cy="2601397"/>
           </a:xfrm>
           <a:prstGeom prst="rect">
             <a:avLst/>
@@ -14951,14 +15541,14 @@
       </p:pic>
       <p:sp>
         <p:nvSpPr>
-          <p:cNvPr id="4" name="Text 1"/>
+          <p:cNvPr id="6" name="Text 3"/>
           <p:cNvSpPr/>
           <p:nvPr/>
         </p:nvSpPr>
         <p:spPr>
           <a:xfrm>
-            <a:off x="5349240" y="1005840"/>
-            <a:ext cx="6522415" cy="731520"/>
+            <a:off x="5349240" y="6089904"/>
+            <a:ext cx="6659575" cy="347472"/>
           </a:xfrm>
           <a:prstGeom prst="rect">
             <a:avLst/>
@@ -14967,68 +15557,24 @@
           <a:ln/>
         </p:spPr>
         <p:txBody>
-          <a:bodyPr wrap="square" lIns="0" tIns="0" rIns="0" bIns="0" rtlCol="0" anchor="ctr">
-            <a:normAutofit/>
-          </a:bodyPr>
+          <a:bodyPr wrap="square" lIns="0" tIns="0" rIns="0" bIns="0" rtlCol="0" anchor="ctr"/>
           <a:lstStyle/>
           <a:p>
             <a:pPr algn="ctr" indent="0" marL="0">
               <a:buNone/>
             </a:pPr>
             <a:r>
-              <a:rPr lang="en-US" sz="3600" b="1" dirty="0">
-                <a:solidFill>
-                  <a:srgbClr val="990011"/>
+              <a:rPr lang="en-US" sz="1600" i="1" dirty="0">
+                <a:solidFill>
+                  <a:srgbClr val="555555"/>
                 </a:solidFill>
                 <a:latin typeface="Times New Roman" pitchFamily="34" charset="0"/>
                 <a:ea typeface="Times New Roman" pitchFamily="34" charset="-122"/>
                 <a:cs typeface="Times New Roman" pitchFamily="34" charset="-120"/>
               </a:rPr>
-              <a:t>Expected Answer</a:t>
-            </a:r>
-            <a:endParaRPr lang="en-US" sz="3600" dirty="0"/>
-          </a:p>
-        </p:txBody>
-      </p:sp>
-      <p:sp>
-        <p:nvSpPr>
-          <p:cNvPr id="5" name="Text 2"/>
-          <p:cNvSpPr/>
-          <p:nvPr/>
-        </p:nvSpPr>
-        <p:spPr>
-          <a:xfrm>
-            <a:off x="5349240" y="1783080"/>
-            <a:ext cx="6522415" cy="4663440"/>
-          </a:xfrm>
-          <a:prstGeom prst="rect">
-            <a:avLst/>
-          </a:prstGeom>
-          <a:noFill/>
-          <a:ln/>
-        </p:spPr>
-        <p:txBody>
-          <a:bodyPr wrap="square" lIns="0" tIns="0" rIns="0" bIns="0" rtlCol="0" anchor="t"/>
-          <a:lstStyle/>
-          <a:p>
-            <a:pPr algn="l" indent="0" marL="0">
-              <a:spcAft>
-                <a:spcPts val="800"/>
-              </a:spcAft>
-              <a:buNone/>
-            </a:pPr>
-            <a:r>
-              <a:rPr lang="en-US" sz="4000" dirty="0">
-                <a:solidFill>
-                  <a:srgbClr val="111111"/>
-                </a:solidFill>
-                <a:latin typeface="Times New Roman" pitchFamily="34" charset="0"/>
-                <a:ea typeface="Times New Roman" pitchFamily="34" charset="-122"/>
-                <a:cs typeface="Times New Roman" pitchFamily="34" charset="-120"/>
-              </a:rPr>
-              <a:t>Air moving from high to low pressure.</a:t>
-            </a:r>
-            <a:endParaRPr lang="en-US" sz="4000" dirty="0"/>
+              <a:t>Illustration: the planetary winds</a:t>
+            </a:r>
+            <a:endParaRPr lang="en-US" sz="1600" dirty="0"/>
           </a:p>
         </p:txBody>
       </p:sp>
@@ -15138,7 +15684,7 @@
                 <a:ea typeface="Calibri" pitchFamily="34" charset="-122"/>
                 <a:cs typeface="Calibri" pitchFamily="34" charset="-120"/>
               </a:rPr>
-              <a:t>FORMATIVE EVALUATION</a:t>
+              <a:t>BOARD SUMMARY</a:t>
             </a:r>
             <a:endParaRPr lang="en-US" sz="1400" dirty="0"/>
           </a:p>
@@ -15203,7 +15749,7 @@
                 <a:ea typeface="Times New Roman" pitchFamily="34" charset="-122"/>
                 <a:cs typeface="Times New Roman" pitchFamily="34" charset="-120"/>
               </a:rPr>
-              <a:t>Evaluation 2</a:t>
+              <a:t>2. Winds and Pressure Belts</a:t>
             </a:r>
             <a:endParaRPr lang="en-US" sz="3600" dirty="0"/>
           </a:p>
@@ -15237,7 +15783,7 @@
               <a:buNone/>
             </a:pPr>
             <a:r>
-              <a:rPr lang="en-US" sz="4000" dirty="0">
+              <a:rPr lang="en-US" sz="4000" b="1" dirty="0">
                 <a:solidFill>
                   <a:srgbClr val="111111"/>
                 </a:solidFill>
@@ -15245,7 +15791,61 @@
                 <a:ea typeface="Times New Roman" pitchFamily="34" charset="-122"/>
                 <a:cs typeface="Times New Roman" pitchFamily="34" charset="-120"/>
               </a:rPr>
-              <a:t>Name two winds that blow over Cameroon.</a:t>
+              <a:t>Westerlies: </a:t>
+            </a:r>
+            <a:pPr algn="l" indent="0" marL="0">
+              <a:spcAft>
+                <a:spcPts val="800"/>
+              </a:spcAft>
+              <a:buNone/>
+            </a:pPr>
+            <a:r>
+              <a:rPr lang="en-US" sz="4000" dirty="0">
+                <a:solidFill>
+                  <a:srgbClr val="111111"/>
+                </a:solidFill>
+                <a:latin typeface="Times New Roman" pitchFamily="34" charset="0"/>
+                <a:ea typeface="Times New Roman" pitchFamily="34" charset="-122"/>
+                <a:cs typeface="Times New Roman" pitchFamily="34" charset="-120"/>
+              </a:rPr>
+              <a:t>They blow from the Subtropical Highs towards the Temperate Lows.</a:t>
+            </a:r>
+            <a:endParaRPr lang="en-US" sz="4000" dirty="0"/>
+          </a:p>
+          <a:p>
+            <a:pPr algn="l" indent="0" marL="0">
+              <a:spcAft>
+                <a:spcPts val="800"/>
+              </a:spcAft>
+              <a:buNone/>
+            </a:pPr>
+            <a:r>
+              <a:rPr lang="en-US" sz="4000" b="1" dirty="0">
+                <a:solidFill>
+                  <a:srgbClr val="111111"/>
+                </a:solidFill>
+                <a:latin typeface="Times New Roman" pitchFamily="34" charset="0"/>
+                <a:ea typeface="Times New Roman" pitchFamily="34" charset="-122"/>
+                <a:cs typeface="Times New Roman" pitchFamily="34" charset="-120"/>
+              </a:rPr>
+              <a:t>Polar easterlies: </a:t>
+            </a:r>
+            <a:pPr algn="l" indent="0" marL="0">
+              <a:spcAft>
+                <a:spcPts val="800"/>
+              </a:spcAft>
+              <a:buNone/>
+            </a:pPr>
+            <a:r>
+              <a:rPr lang="en-US" sz="4000" dirty="0">
+                <a:solidFill>
+                  <a:srgbClr val="111111"/>
+                </a:solidFill>
+                <a:latin typeface="Times New Roman" pitchFamily="34" charset="0"/>
+                <a:ea typeface="Times New Roman" pitchFamily="34" charset="-122"/>
+                <a:cs typeface="Times New Roman" pitchFamily="34" charset="-120"/>
+              </a:rPr>
+              <a:t>They blow from the Polar Highs towards the Temperate Lows.</a:t>
             </a:r>
             <a:endParaRPr lang="en-US" sz="4000" dirty="0"/>
           </a:p>
@@ -15357,15 +15957,115 @@
                 <a:ea typeface="Calibri" pitchFamily="34" charset="-122"/>
                 <a:cs typeface="Calibri" pitchFamily="34" charset="-120"/>
               </a:rPr>
-              <a:t>FORMATIVE EVALUATION</a:t>
+              <a:t>BOARD SUMMARY</a:t>
             </a:r>
             <a:endParaRPr lang="en-US" sz="1400" dirty="0"/>
+          </a:p>
+        </p:txBody>
+      </p:sp>
+      <p:sp>
+        <p:nvSpPr>
+          <p:cNvPr id="3" name="Text 1"/>
+          <p:cNvSpPr/>
+          <p:nvPr/>
+        </p:nvSpPr>
+        <p:spPr>
+          <a:xfrm>
+            <a:off x="365760" y="1005840"/>
+            <a:ext cx="11460175" cy="731520"/>
+          </a:xfrm>
+          <a:prstGeom prst="rect">
+            <a:avLst/>
+          </a:prstGeom>
+          <a:noFill/>
+          <a:ln/>
+        </p:spPr>
+        <p:txBody>
+          <a:bodyPr wrap="square" lIns="0" tIns="0" rIns="0" bIns="0" rtlCol="0" anchor="ctr">
+            <a:normAutofit/>
+          </a:bodyPr>
+          <a:lstStyle/>
+          <a:p>
+            <a:pPr algn="ctr" indent="0" marL="0">
+              <a:buNone/>
+            </a:pPr>
+            <a:r>
+              <a:rPr lang="en-US" sz="3600" b="1" dirty="0">
+                <a:solidFill>
+                  <a:srgbClr val="990011"/>
+                </a:solidFill>
+                <a:latin typeface="Times New Roman" pitchFamily="34" charset="0"/>
+                <a:ea typeface="Times New Roman" pitchFamily="34" charset="-122"/>
+                <a:cs typeface="Times New Roman" pitchFamily="34" charset="-120"/>
+              </a:rPr>
+              <a:t>2. Winds and Pressure Belts</a:t>
+            </a:r>
+            <a:endParaRPr lang="en-US" sz="3600" dirty="0"/>
+          </a:p>
+        </p:txBody>
+      </p:sp>
+      <p:sp>
+        <p:nvSpPr>
+          <p:cNvPr id="4" name="Text 2"/>
+          <p:cNvSpPr/>
+          <p:nvPr/>
+        </p:nvSpPr>
+        <p:spPr>
+          <a:xfrm>
+            <a:off x="365760" y="1783080"/>
+            <a:ext cx="4846320" cy="4617720"/>
+          </a:xfrm>
+          <a:prstGeom prst="rect">
+            <a:avLst/>
+          </a:prstGeom>
+          <a:noFill/>
+          <a:ln/>
+        </p:spPr>
+        <p:txBody>
+          <a:bodyPr wrap="square" lIns="0" tIns="0" rIns="0" bIns="0" rtlCol="0" anchor="t"/>
+          <a:lstStyle/>
+          <a:p>
+            <a:pPr algn="l" indent="0" marL="0">
+              <a:spcAft>
+                <a:spcPts val="800"/>
+              </a:spcAft>
+              <a:buNone/>
+            </a:pPr>
+            <a:r>
+              <a:rPr lang="en-US" sz="3600" b="1" dirty="0">
+                <a:solidFill>
+                  <a:srgbClr val="111111"/>
+                </a:solidFill>
+                <a:latin typeface="Times New Roman" pitchFamily="34" charset="0"/>
+                <a:ea typeface="Times New Roman" pitchFamily="34" charset="-122"/>
+                <a:cs typeface="Times New Roman" pitchFamily="34" charset="-120"/>
+              </a:rPr>
+              <a:t>Harmattan: </a:t>
+            </a:r>
+            <a:pPr algn="l" indent="0" marL="0">
+              <a:spcAft>
+                <a:spcPts val="800"/>
+              </a:spcAft>
+              <a:buNone/>
+            </a:pPr>
+            <a:r>
+              <a:rPr lang="en-US" sz="3600" dirty="0">
+                <a:solidFill>
+                  <a:srgbClr val="111111"/>
+                </a:solidFill>
+                <a:latin typeface="Times New Roman" pitchFamily="34" charset="0"/>
+                <a:ea typeface="Times New Roman" pitchFamily="34" charset="-122"/>
+                <a:cs typeface="Times New Roman" pitchFamily="34" charset="-120"/>
+              </a:rPr>
+              <a:t>It is a dry, dusty wind from the Sahara that blows over the north of Cameroon in the dry season.</a:t>
+            </a:r>
+            <a:endParaRPr lang="en-US" sz="3600" dirty="0"/>
           </a:p>
         </p:txBody>
       </p:sp>
       <p:pic>
         <p:nvPicPr>
-          <p:cNvPr id="3" name="Image 0" descr="/home/claude/f4/img/minesec_sheet.png">    </p:cNvPr>
+          <p:cNvPr id="5" name="Image 0" descr="/home/claude/f4/img/v2/f2t_harmattan.jpg">    </p:cNvPr>
           <p:cNvPicPr>
             <a:picLocks noChangeAspect="1"/>
           </p:cNvPicPr>
@@ -15379,8 +16079,8 @@
         </p:blipFill>
         <p:spPr>
           <a:xfrm>
-            <a:off x="0" y="658368"/>
-            <a:ext cx="5120640" cy="5833872"/>
+            <a:off x="5349240" y="2071212"/>
+            <a:ext cx="6659575" cy="3693983"/>
           </a:xfrm>
           <a:prstGeom prst="rect">
             <a:avLst/>
@@ -15389,14 +16089,14 @@
       </p:pic>
       <p:sp>
         <p:nvSpPr>
-          <p:cNvPr id="4" name="Text 1"/>
+          <p:cNvPr id="6" name="Text 3"/>
           <p:cNvSpPr/>
           <p:nvPr/>
         </p:nvSpPr>
         <p:spPr>
           <a:xfrm>
-            <a:off x="5349240" y="1005840"/>
-            <a:ext cx="6522415" cy="731520"/>
+            <a:off x="5349240" y="6089904"/>
+            <a:ext cx="6659575" cy="347472"/>
           </a:xfrm>
           <a:prstGeom prst="rect">
             <a:avLst/>
@@ -15405,68 +16105,24 @@
           <a:ln/>
         </p:spPr>
         <p:txBody>
-          <a:bodyPr wrap="square" lIns="0" tIns="0" rIns="0" bIns="0" rtlCol="0" anchor="ctr">
-            <a:normAutofit/>
-          </a:bodyPr>
+          <a:bodyPr wrap="square" lIns="0" tIns="0" rIns="0" bIns="0" rtlCol="0" anchor="ctr"/>
           <a:lstStyle/>
           <a:p>
             <a:pPr algn="ctr" indent="0" marL="0">
               <a:buNone/>
             </a:pPr>
             <a:r>
-              <a:rPr lang="en-US" sz="3600" b="1" dirty="0">
-                <a:solidFill>
-                  <a:srgbClr val="990011"/>
+              <a:rPr lang="en-US" sz="1600" i="1" dirty="0">
+                <a:solidFill>
+                  <a:srgbClr val="555555"/>
                 </a:solidFill>
                 <a:latin typeface="Times New Roman" pitchFamily="34" charset="0"/>
                 <a:ea typeface="Times New Roman" pitchFamily="34" charset="-122"/>
                 <a:cs typeface="Times New Roman" pitchFamily="34" charset="-120"/>
               </a:rPr>
-              <a:t>Expected Answer</a:t>
-            </a:r>
-            <a:endParaRPr lang="en-US" sz="3600" dirty="0"/>
-          </a:p>
-        </p:txBody>
-      </p:sp>
-      <p:sp>
-        <p:nvSpPr>
-          <p:cNvPr id="5" name="Text 2"/>
-          <p:cNvSpPr/>
-          <p:nvPr/>
-        </p:nvSpPr>
-        <p:spPr>
-          <a:xfrm>
-            <a:off x="5349240" y="1783080"/>
-            <a:ext cx="6522415" cy="4663440"/>
-          </a:xfrm>
-          <a:prstGeom prst="rect">
-            <a:avLst/>
-          </a:prstGeom>
-          <a:noFill/>
-          <a:ln/>
-        </p:spPr>
-        <p:txBody>
-          <a:bodyPr wrap="square" lIns="0" tIns="0" rIns="0" bIns="0" rtlCol="0" anchor="t"/>
-          <a:lstStyle/>
-          <a:p>
-            <a:pPr algn="l" indent="0" marL="0">
-              <a:spcAft>
-                <a:spcPts val="800"/>
-              </a:spcAft>
-              <a:buNone/>
-            </a:pPr>
-            <a:r>
-              <a:rPr lang="en-US" sz="4000" dirty="0">
-                <a:solidFill>
-                  <a:srgbClr val="111111"/>
-                </a:solidFill>
-                <a:latin typeface="Times New Roman" pitchFamily="34" charset="0"/>
-                <a:ea typeface="Times New Roman" pitchFamily="34" charset="-122"/>
-                <a:cs typeface="Times New Roman" pitchFamily="34" charset="-120"/>
-              </a:rPr>
-              <a:t>The Harmattan and the south-west monsoon.</a:t>
-            </a:r>
-            <a:endParaRPr lang="en-US" sz="4000" dirty="0"/>
+              <a:t>Illustration: a Harmattan sky</a:t>
+            </a:r>
+            <a:endParaRPr lang="en-US" sz="1600" dirty="0"/>
           </a:p>
         </p:txBody>
       </p:sp>
@@ -15576,15 +16232,115 @@
                 <a:ea typeface="Calibri" pitchFamily="34" charset="-122"/>
                 <a:cs typeface="Calibri" pitchFamily="34" charset="-120"/>
               </a:rPr>
-              <a:t>REMEDIATION</a:t>
+              <a:t>BOARD SUMMARY</a:t>
             </a:r>
             <a:endParaRPr lang="en-US" sz="1400" dirty="0"/>
+          </a:p>
+        </p:txBody>
+      </p:sp>
+      <p:sp>
+        <p:nvSpPr>
+          <p:cNvPr id="3" name="Text 1"/>
+          <p:cNvSpPr/>
+          <p:nvPr/>
+        </p:nvSpPr>
+        <p:spPr>
+          <a:xfrm>
+            <a:off x="365760" y="1005840"/>
+            <a:ext cx="11460175" cy="731520"/>
+          </a:xfrm>
+          <a:prstGeom prst="rect">
+            <a:avLst/>
+          </a:prstGeom>
+          <a:noFill/>
+          <a:ln/>
+        </p:spPr>
+        <p:txBody>
+          <a:bodyPr wrap="square" lIns="0" tIns="0" rIns="0" bIns="0" rtlCol="0" anchor="ctr">
+            <a:normAutofit/>
+          </a:bodyPr>
+          <a:lstStyle/>
+          <a:p>
+            <a:pPr algn="ctr" indent="0" marL="0">
+              <a:buNone/>
+            </a:pPr>
+            <a:r>
+              <a:rPr lang="en-US" sz="3600" b="1" dirty="0">
+                <a:solidFill>
+                  <a:srgbClr val="990011"/>
+                </a:solidFill>
+                <a:latin typeface="Times New Roman" pitchFamily="34" charset="0"/>
+                <a:ea typeface="Times New Roman" pitchFamily="34" charset="-122"/>
+                <a:cs typeface="Times New Roman" pitchFamily="34" charset="-120"/>
+              </a:rPr>
+              <a:t>2. Winds and Pressure Belts</a:t>
+            </a:r>
+            <a:endParaRPr lang="en-US" sz="3600" dirty="0"/>
+          </a:p>
+        </p:txBody>
+      </p:sp>
+      <p:sp>
+        <p:nvSpPr>
+          <p:cNvPr id="4" name="Text 2"/>
+          <p:cNvSpPr/>
+          <p:nvPr/>
+        </p:nvSpPr>
+        <p:spPr>
+          <a:xfrm>
+            <a:off x="365760" y="1783080"/>
+            <a:ext cx="4846320" cy="4617720"/>
+          </a:xfrm>
+          <a:prstGeom prst="rect">
+            <a:avLst/>
+          </a:prstGeom>
+          <a:noFill/>
+          <a:ln/>
+        </p:spPr>
+        <p:txBody>
+          <a:bodyPr wrap="square" lIns="0" tIns="0" rIns="0" bIns="0" rtlCol="0" anchor="t"/>
+          <a:lstStyle/>
+          <a:p>
+            <a:pPr algn="l" indent="0" marL="0">
+              <a:spcAft>
+                <a:spcPts val="800"/>
+              </a:spcAft>
+              <a:buNone/>
+            </a:pPr>
+            <a:r>
+              <a:rPr lang="en-US" sz="3600" b="1" dirty="0">
+                <a:solidFill>
+                  <a:srgbClr val="111111"/>
+                </a:solidFill>
+                <a:latin typeface="Times New Roman" pitchFamily="34" charset="0"/>
+                <a:ea typeface="Times New Roman" pitchFamily="34" charset="-122"/>
+                <a:cs typeface="Times New Roman" pitchFamily="34" charset="-120"/>
+              </a:rPr>
+              <a:t>South-west monsoon: </a:t>
+            </a:r>
+            <a:pPr algn="l" indent="0" marL="0">
+              <a:spcAft>
+                <a:spcPts val="800"/>
+              </a:spcAft>
+              <a:buNone/>
+            </a:pPr>
+            <a:r>
+              <a:rPr lang="en-US" sz="3600" dirty="0">
+                <a:solidFill>
+                  <a:srgbClr val="111111"/>
+                </a:solidFill>
+                <a:latin typeface="Times New Roman" pitchFamily="34" charset="0"/>
+                <a:ea typeface="Times New Roman" pitchFamily="34" charset="-122"/>
+                <a:cs typeface="Times New Roman" pitchFamily="34" charset="-120"/>
+              </a:rPr>
+              <a:t>It is a moist wind from the Atlantic Ocean that brings rain in the rainy season.</a:t>
+            </a:r>
+            <a:endParaRPr lang="en-US" sz="3600" dirty="0"/>
           </a:p>
         </p:txBody>
       </p:sp>
       <p:pic>
         <p:nvPicPr>
-          <p:cNvPr id="3" name="Image 0" descr="/home/claude/f4/img/minesec_sheet.png">    </p:cNvPr>
+          <p:cNvPr id="5" name="Image 0" descr="/home/claude/f4/img/v2/lsa_monsoon.jpg">    </p:cNvPr>
           <p:cNvPicPr>
             <a:picLocks noChangeAspect="1"/>
           </p:cNvPicPr>
@@ -15598,8 +16354,8 @@
         </p:blipFill>
         <p:spPr>
           <a:xfrm>
-            <a:off x="0" y="658368"/>
-            <a:ext cx="2468880" cy="5833872"/>
+            <a:off x="5349240" y="2071212"/>
+            <a:ext cx="6659575" cy="3693983"/>
           </a:xfrm>
           <a:prstGeom prst="rect">
             <a:avLst/>
@@ -15608,14 +16364,14 @@
       </p:pic>
       <p:sp>
         <p:nvSpPr>
-          <p:cNvPr id="4" name="Text 1"/>
+          <p:cNvPr id="6" name="Text 3"/>
           <p:cNvSpPr/>
           <p:nvPr/>
         </p:nvSpPr>
         <p:spPr>
           <a:xfrm>
-            <a:off x="2697480" y="1005840"/>
-            <a:ext cx="9174175" cy="731520"/>
+            <a:off x="5349240" y="6089904"/>
+            <a:ext cx="6659575" cy="347472"/>
           </a:xfrm>
           <a:prstGeom prst="rect">
             <a:avLst/>
@@ -15624,134 +16380,24 @@
           <a:ln/>
         </p:spPr>
         <p:txBody>
-          <a:bodyPr wrap="square" lIns="0" tIns="0" rIns="0" bIns="0" rtlCol="0" anchor="ctr">
-            <a:normAutofit/>
-          </a:bodyPr>
+          <a:bodyPr wrap="square" lIns="0" tIns="0" rIns="0" bIns="0" rtlCol="0" anchor="ctr"/>
           <a:lstStyle/>
           <a:p>
             <a:pPr algn="ctr" indent="0" marL="0">
               <a:buNone/>
             </a:pPr>
             <a:r>
-              <a:rPr lang="en-US" sz="3600" b="1" dirty="0">
-                <a:solidFill>
-                  <a:srgbClr val="990011"/>
+              <a:rPr lang="en-US" sz="1600" i="1" dirty="0">
+                <a:solidFill>
+                  <a:srgbClr val="555555"/>
                 </a:solidFill>
                 <a:latin typeface="Times New Roman" pitchFamily="34" charset="0"/>
                 <a:ea typeface="Times New Roman" pitchFamily="34" charset="-122"/>
                 <a:cs typeface="Times New Roman" pitchFamily="34" charset="-120"/>
               </a:rPr>
-              <a:t>Remediation</a:t>
-            </a:r>
-            <a:endParaRPr lang="en-US" sz="3600" dirty="0"/>
-          </a:p>
-        </p:txBody>
-      </p:sp>
-      <p:sp>
-        <p:nvSpPr>
-          <p:cNvPr id="5" name="Text 2"/>
-          <p:cNvSpPr/>
-          <p:nvPr/>
-        </p:nvSpPr>
-        <p:spPr>
-          <a:xfrm>
-            <a:off x="2697480" y="1783080"/>
-            <a:ext cx="9174175" cy="4663440"/>
-          </a:xfrm>
-          <a:prstGeom prst="rect">
-            <a:avLst/>
-          </a:prstGeom>
-          <a:noFill/>
-          <a:ln/>
-        </p:spPr>
-        <p:txBody>
-          <a:bodyPr wrap="square" lIns="0" tIns="0" rIns="0" bIns="0" rtlCol="0" anchor="t"/>
-          <a:lstStyle/>
-          <a:p>
-            <a:pPr algn="l" indent="0" marL="0">
-              <a:spcAft>
-                <a:spcPts val="800"/>
-              </a:spcAft>
-              <a:buNone/>
-            </a:pPr>
-            <a:r>
-              <a:rPr lang="en-US" sz="4000" b="1" dirty="0">
-                <a:solidFill>
-                  <a:srgbClr val="111111"/>
-                </a:solidFill>
-                <a:latin typeface="Times New Roman" pitchFamily="34" charset="0"/>
-                <a:ea typeface="Times New Roman" pitchFamily="34" charset="-122"/>
-                <a:cs typeface="Times New Roman" pitchFamily="34" charset="-120"/>
-              </a:rPr>
-              <a:t>Fill in the blanks:</a:t>
-            </a:r>
-            <a:endParaRPr lang="en-US" sz="4000" dirty="0"/>
-          </a:p>
-          <a:p>
-            <a:pPr algn="l" marL="342900" indent="-342900">
-              <a:spcAft>
-                <a:spcPts val="800"/>
-              </a:spcAft>
-              <a:buSzPct val="100000"/>
-              <a:buFont typeface="+mj-lt"/>
-              <a:buAutoNum type="arabicPeriod" startAt="1"/>
-            </a:pPr>
-            <a:r>
-              <a:rPr lang="en-US" sz="4000" dirty="0">
-                <a:solidFill>
-                  <a:srgbClr val="111111"/>
-                </a:solidFill>
-                <a:latin typeface="Times New Roman" pitchFamily="34" charset="0"/>
-                <a:ea typeface="Times New Roman" pitchFamily="34" charset="-122"/>
-                <a:cs typeface="Times New Roman" pitchFamily="34" charset="-120"/>
-              </a:rPr>
-              <a:t>Pressure is measured with a ______.</a:t>
-            </a:r>
-            <a:endParaRPr lang="en-US" sz="4000" dirty="0"/>
-          </a:p>
-          <a:p>
-            <a:pPr algn="l" marL="342900" indent="-342900">
-              <a:spcAft>
-                <a:spcPts val="800"/>
-              </a:spcAft>
-              <a:buSzPct val="100000"/>
-              <a:buFont typeface="+mj-lt"/>
-              <a:buAutoNum type="arabicPeriod" startAt="1"/>
-            </a:pPr>
-            <a:r>
-              <a:rPr lang="en-US" sz="4000" dirty="0">
-                <a:solidFill>
-                  <a:srgbClr val="111111"/>
-                </a:solidFill>
-                <a:latin typeface="Times New Roman" pitchFamily="34" charset="0"/>
-                <a:ea typeface="Times New Roman" pitchFamily="34" charset="-122"/>
-                <a:cs typeface="Times New Roman" pitchFamily="34" charset="-120"/>
-              </a:rPr>
-              <a:t>Hot rising air gives ______ pressure.</a:t>
-            </a:r>
-            <a:endParaRPr lang="en-US" sz="4000" dirty="0"/>
-          </a:p>
-          <a:p>
-            <a:pPr algn="l" marL="342900" indent="-342900">
-              <a:spcAft>
-                <a:spcPts val="800"/>
-              </a:spcAft>
-              <a:buSzPct val="100000"/>
-              <a:buFont typeface="+mj-lt"/>
-              <a:buAutoNum type="arabicPeriod" startAt="1"/>
-            </a:pPr>
-            <a:r>
-              <a:rPr lang="en-US" sz="4000" dirty="0">
-                <a:solidFill>
-                  <a:srgbClr val="111111"/>
-                </a:solidFill>
-                <a:latin typeface="Times New Roman" pitchFamily="34" charset="0"/>
-                <a:ea typeface="Times New Roman" pitchFamily="34" charset="-122"/>
-                <a:cs typeface="Times New Roman" pitchFamily="34" charset="-120"/>
-              </a:rPr>
-              <a:t>The dry wind from the Sahara is the ______.</a:t>
-            </a:r>
-            <a:endParaRPr lang="en-US" sz="4000" dirty="0"/>
+              <a:t>Illustration: monsoon rain</a:t>
+            </a:r>
+            <a:endParaRPr lang="en-US" sz="1600" dirty="0"/>
           </a:p>
         </p:txBody>
       </p:sp>
@@ -15861,7 +16507,7 @@
                 <a:ea typeface="Calibri" pitchFamily="34" charset="-122"/>
                 <a:cs typeface="Calibri" pitchFamily="34" charset="-120"/>
               </a:rPr>
-              <a:t>HOMEWORK</a:t>
+              <a:t>FORMATIVE EVALUATION</a:t>
             </a:r>
             <a:endParaRPr lang="en-US" sz="1400" dirty="0"/>
           </a:p>
@@ -15926,7 +16572,7 @@
                 <a:ea typeface="Times New Roman" pitchFamily="34" charset="-122"/>
                 <a:cs typeface="Times New Roman" pitchFamily="34" charset="-120"/>
               </a:rPr>
-              <a:t>Homework</a:t>
+              <a:t>Evaluation 1</a:t>
             </a:r>
             <a:endParaRPr lang="en-US" sz="3600" dirty="0"/>
           </a:p>
@@ -15968,7 +16614,7 @@
                 <a:ea typeface="Times New Roman" pitchFamily="34" charset="-122"/>
                 <a:cs typeface="Times New Roman" pitchFamily="34" charset="-120"/>
               </a:rPr>
-              <a:t>Observe the wind for three days and write its direction and whether it is dry or moist.</a:t>
+              <a:t>What is wind?</a:t>
             </a:r>
             <a:endParaRPr lang="en-US" sz="4000" dirty="0"/>
           </a:p>
@@ -16080,7 +16726,7 @@
                 <a:ea typeface="Calibri" pitchFamily="34" charset="-122"/>
                 <a:cs typeface="Calibri" pitchFamily="34" charset="-120"/>
               </a:rPr>
-              <a:t>NEXT LESSON</a:t>
+              <a:t>FORMATIVE EVALUATION</a:t>
             </a:r>
             <a:endParaRPr lang="en-US" sz="1400" dirty="0"/>
           </a:p>
@@ -16145,7 +16791,7 @@
                 <a:ea typeface="Times New Roman" pitchFamily="34" charset="-122"/>
                 <a:cs typeface="Times New Roman" pitchFamily="34" charset="-120"/>
               </a:rPr>
-              <a:t>Next Lesson</a:t>
+              <a:t>Expected Answer</a:t>
             </a:r>
             <a:endParaRPr lang="en-US" sz="3600" dirty="0"/>
           </a:p>
@@ -16169,17 +16815,17 @@
           <a:ln/>
         </p:spPr>
         <p:txBody>
-          <a:bodyPr wrap="square" lIns="0" tIns="0" rIns="0" bIns="0" rtlCol="0" anchor="ctr"/>
-          <a:lstStyle/>
-          <a:p>
-            <a:pPr algn="ctr" indent="0" marL="0">
+          <a:bodyPr wrap="square" lIns="0" tIns="0" rIns="0" bIns="0" rtlCol="0" anchor="t"/>
+          <a:lstStyle/>
+          <a:p>
+            <a:pPr algn="l" indent="0" marL="0">
               <a:spcAft>
                 <a:spcPts val="800"/>
               </a:spcAft>
               <a:buNone/>
             </a:pPr>
             <a:r>
-              <a:rPr lang="en-US" sz="4000" b="1" dirty="0">
+              <a:rPr lang="en-US" sz="4000" dirty="0">
                 <a:solidFill>
                   <a:srgbClr val="111111"/>
                 </a:solidFill>
@@ -16187,27 +16833,7 @@
                 <a:ea typeface="Times New Roman" pitchFamily="34" charset="-122"/>
                 <a:cs typeface="Times New Roman" pitchFamily="34" charset="-120"/>
               </a:rPr>
-              <a:t>Our next lesson will be on:</a:t>
-            </a:r>
-            <a:endParaRPr lang="en-US" sz="4000" dirty="0"/>
-          </a:p>
-          <a:p>
-            <a:pPr algn="ctr" indent="0" marL="0">
-              <a:spcAft>
-                <a:spcPts val="800"/>
-              </a:spcAft>
-              <a:buNone/>
-            </a:pPr>
-            <a:r>
-              <a:rPr lang="en-US" sz="4000" b="1" dirty="0">
-                <a:solidFill>
-                  <a:srgbClr val="990011"/>
-                </a:solidFill>
-                <a:latin typeface="Times New Roman" pitchFamily="34" charset="0"/>
-                <a:ea typeface="Times New Roman" pitchFamily="34" charset="-122"/>
-                <a:cs typeface="Times New Roman" pitchFamily="34" charset="-120"/>
-              </a:rPr>
-              <a:t>Lesson 9: Atmospheric Disturbances</a:t>
+              <a:t>Air moving from high to low pressure.</a:t>
             </a:r>
             <a:endParaRPr lang="en-US" sz="4000" dirty="0"/>
           </a:p>
@@ -16319,6 +16945,1406 @@
                 <a:ea typeface="Calibri" pitchFamily="34" charset="-122"/>
                 <a:cs typeface="Calibri" pitchFamily="34" charset="-120"/>
               </a:rPr>
+              <a:t>FORMATIVE EVALUATION</a:t>
+            </a:r>
+            <a:endParaRPr lang="en-US" sz="1400" dirty="0"/>
+          </a:p>
+        </p:txBody>
+      </p:sp>
+      <p:pic>
+        <p:nvPicPr>
+          <p:cNvPr id="3" name="Image 0" descr="/home/claude/f4/img/minesec_sheet.png">    </p:cNvPr>
+          <p:cNvPicPr>
+            <a:picLocks noChangeAspect="1"/>
+          </p:cNvPicPr>
+          <p:nvPr/>
+        </p:nvPicPr>
+        <p:blipFill>
+          <a:blip r:embed="rId1"/>
+          <a:stretch>
+            <a:fillRect/>
+          </a:stretch>
+        </p:blipFill>
+        <p:spPr>
+          <a:xfrm>
+            <a:off x="0" y="658368"/>
+            <a:ext cx="5120640" cy="5833872"/>
+          </a:xfrm>
+          <a:prstGeom prst="rect">
+            <a:avLst/>
+          </a:prstGeom>
+        </p:spPr>
+      </p:pic>
+      <p:sp>
+        <p:nvSpPr>
+          <p:cNvPr id="4" name="Text 1"/>
+          <p:cNvSpPr/>
+          <p:nvPr/>
+        </p:nvSpPr>
+        <p:spPr>
+          <a:xfrm>
+            <a:off x="5349240" y="1005840"/>
+            <a:ext cx="6522415" cy="731520"/>
+          </a:xfrm>
+          <a:prstGeom prst="rect">
+            <a:avLst/>
+          </a:prstGeom>
+          <a:noFill/>
+          <a:ln/>
+        </p:spPr>
+        <p:txBody>
+          <a:bodyPr wrap="square" lIns="0" tIns="0" rIns="0" bIns="0" rtlCol="0" anchor="ctr">
+            <a:normAutofit/>
+          </a:bodyPr>
+          <a:lstStyle/>
+          <a:p>
+            <a:pPr algn="ctr" indent="0" marL="0">
+              <a:buNone/>
+            </a:pPr>
+            <a:r>
+              <a:rPr lang="en-US" sz="3600" b="1" dirty="0">
+                <a:solidFill>
+                  <a:srgbClr val="990011"/>
+                </a:solidFill>
+                <a:latin typeface="Times New Roman" pitchFamily="34" charset="0"/>
+                <a:ea typeface="Times New Roman" pitchFamily="34" charset="-122"/>
+                <a:cs typeface="Times New Roman" pitchFamily="34" charset="-120"/>
+              </a:rPr>
+              <a:t>Evaluation 2</a:t>
+            </a:r>
+            <a:endParaRPr lang="en-US" sz="3600" dirty="0"/>
+          </a:p>
+        </p:txBody>
+      </p:sp>
+      <p:sp>
+        <p:nvSpPr>
+          <p:cNvPr id="5" name="Text 2"/>
+          <p:cNvSpPr/>
+          <p:nvPr/>
+        </p:nvSpPr>
+        <p:spPr>
+          <a:xfrm>
+            <a:off x="5349240" y="1783080"/>
+            <a:ext cx="6522415" cy="4663440"/>
+          </a:xfrm>
+          <a:prstGeom prst="rect">
+            <a:avLst/>
+          </a:prstGeom>
+          <a:noFill/>
+          <a:ln/>
+        </p:spPr>
+        <p:txBody>
+          <a:bodyPr wrap="square" lIns="0" tIns="0" rIns="0" bIns="0" rtlCol="0" anchor="t"/>
+          <a:lstStyle/>
+          <a:p>
+            <a:pPr algn="l" indent="0" marL="0">
+              <a:spcAft>
+                <a:spcPts val="800"/>
+              </a:spcAft>
+              <a:buNone/>
+            </a:pPr>
+            <a:r>
+              <a:rPr lang="en-US" sz="4000" dirty="0">
+                <a:solidFill>
+                  <a:srgbClr val="111111"/>
+                </a:solidFill>
+                <a:latin typeface="Times New Roman" pitchFamily="34" charset="0"/>
+                <a:ea typeface="Times New Roman" pitchFamily="34" charset="-122"/>
+                <a:cs typeface="Times New Roman" pitchFamily="34" charset="-120"/>
+              </a:rPr>
+              <a:t>Name two winds that blow over Cameroon.</a:t>
+            </a:r>
+            <a:endParaRPr lang="en-US" sz="4000" dirty="0"/>
+          </a:p>
+        </p:txBody>
+      </p:sp>
+      <p:sp>
+        <p:nvSpPr>
+          <p:cNvPr id="25" name="Slide Number Placeholder 0"/>
+          <p:cNvSpPr>
+            <a:spLocks noGrp="1"/>
+          </p:cNvSpPr>
+          <p:nvPr>
+            <p:ph type="sldNum" sz="quarter" idx="4294967295"/>
+          </p:nvPr>
+        </p:nvSpPr>
+        <p:spPr>
+          <a:xfrm>
+            <a:off x="27432" y="91440"/>
+            <a:ext cx="585216" cy="475488"/>
+          </a:xfrm>
+          <a:prstGeom prst="rect">
+            <a:avLst/>
+          </a:prstGeom>
+          <a:extLst>
+            <a:ext uri="{C572A759-6A51-4108-AA02-DFA0A04FC94B}">
+              <ma14:wrappingTextBoxFlag xmlns:ma14="http://schemas.microsoft.com/office/mac/drawingml/2011/main" val="0"/>
+            </a:ext>
+          </a:extLst>
+        </p:spPr>
+        <p:txBody>
+          <a:bodyPr/>
+          <a:lstStyle>
+            <a:lvl1pPr>
+              <a:defRPr sz="2000">
+                <a:solidFill>
+                  <a:srgbClr val="FFFFFF"/>
+                </a:solidFill>
+                <a:latin typeface="Calibri"/>
+                <a:ea typeface="Calibri"/>
+                <a:cs typeface="Calibri"/>
+              </a:defRPr>
+            </a:lvl1pPr>
+          </a:lstStyle>
+          <a:p>
+            <a:pPr algn="ctr"/>
+            <a:fld id="{F7021451-1387-4CA6-816F-3879F97B5CBC}" type="slidenum">
+              <a:rPr b="1" lang="en-US"/>
+              <a:t>46</a:t>
+            </a:fld>
+            <a:endParaRPr lang="en-US"/>
+          </a:p>
+        </p:txBody>
+      </p:sp>
+    </p:spTree>
+  </p:cSld>
+  <p:clrMapOvr>
+    <a:masterClrMapping/>
+  </p:clrMapOvr>
+</p:sld>
+</file>
+
+<file path=ppt/slides/slide47.xml><?xml version="1.0" encoding="utf-8"?>
+<p:sld xmlns:a="http://schemas.openxmlformats.org/drawingml/2006/main" xmlns:r="http://schemas.openxmlformats.org/officeDocument/2006/relationships" xmlns:p="http://schemas.openxmlformats.org/presentationml/2006/main">
+  <p:cSld name="Slide 47">
+    <p:spTree>
+      <p:nvGrpSpPr>
+        <p:cNvPr id="1" name=""/>
+        <p:cNvGrpSpPr/>
+        <p:nvPr/>
+      </p:nvGrpSpPr>
+      <p:grpSpPr>
+        <a:xfrm>
+          <a:off x="0" y="0"/>
+          <a:ext cx="0" cy="0"/>
+          <a:chOff x="0" y="0"/>
+          <a:chExt cx="0" cy="0"/>
+        </a:xfrm>
+      </p:grpSpPr>
+      <p:sp>
+        <p:nvSpPr>
+          <p:cNvPr id="2" name="Text 0"/>
+          <p:cNvSpPr/>
+          <p:nvPr/>
+        </p:nvSpPr>
+        <p:spPr>
+          <a:xfrm>
+            <a:off x="457200" y="713232"/>
+            <a:ext cx="11368735" cy="274320"/>
+          </a:xfrm>
+          <a:prstGeom prst="rect">
+            <a:avLst/>
+          </a:prstGeom>
+          <a:noFill/>
+          <a:ln/>
+        </p:spPr>
+        <p:txBody>
+          <a:bodyPr wrap="square" lIns="0" tIns="0" rIns="0" bIns="0" rtlCol="0" anchor="ctr"/>
+          <a:lstStyle/>
+          <a:p>
+            <a:pPr algn="r" indent="0" marL="0">
+              <a:buNone/>
+            </a:pPr>
+            <a:r>
+              <a:rPr lang="en-US" sz="1400" b="1" dirty="0">
+                <a:solidFill>
+                  <a:srgbClr val="1C3F6E"/>
+                </a:solidFill>
+                <a:latin typeface="Calibri" pitchFamily="34" charset="0"/>
+                <a:ea typeface="Calibri" pitchFamily="34" charset="-122"/>
+                <a:cs typeface="Calibri" pitchFamily="34" charset="-120"/>
+              </a:rPr>
+              <a:t>FORMATIVE EVALUATION</a:t>
+            </a:r>
+            <a:endParaRPr lang="en-US" sz="1400" dirty="0"/>
+          </a:p>
+        </p:txBody>
+      </p:sp>
+      <p:pic>
+        <p:nvPicPr>
+          <p:cNvPr id="3" name="Image 0" descr="/home/claude/f4/img/minesec_sheet.png">    </p:cNvPr>
+          <p:cNvPicPr>
+            <a:picLocks noChangeAspect="1"/>
+          </p:cNvPicPr>
+          <p:nvPr/>
+        </p:nvPicPr>
+        <p:blipFill>
+          <a:blip r:embed="rId1"/>
+          <a:stretch>
+            <a:fillRect/>
+          </a:stretch>
+        </p:blipFill>
+        <p:spPr>
+          <a:xfrm>
+            <a:off x="0" y="658368"/>
+            <a:ext cx="5120640" cy="5833872"/>
+          </a:xfrm>
+          <a:prstGeom prst="rect">
+            <a:avLst/>
+          </a:prstGeom>
+        </p:spPr>
+      </p:pic>
+      <p:sp>
+        <p:nvSpPr>
+          <p:cNvPr id="4" name="Text 1"/>
+          <p:cNvSpPr/>
+          <p:nvPr/>
+        </p:nvSpPr>
+        <p:spPr>
+          <a:xfrm>
+            <a:off x="5349240" y="1005840"/>
+            <a:ext cx="6522415" cy="731520"/>
+          </a:xfrm>
+          <a:prstGeom prst="rect">
+            <a:avLst/>
+          </a:prstGeom>
+          <a:noFill/>
+          <a:ln/>
+        </p:spPr>
+        <p:txBody>
+          <a:bodyPr wrap="square" lIns="0" tIns="0" rIns="0" bIns="0" rtlCol="0" anchor="ctr">
+            <a:normAutofit/>
+          </a:bodyPr>
+          <a:lstStyle/>
+          <a:p>
+            <a:pPr algn="ctr" indent="0" marL="0">
+              <a:buNone/>
+            </a:pPr>
+            <a:r>
+              <a:rPr lang="en-US" sz="3600" b="1" dirty="0">
+                <a:solidFill>
+                  <a:srgbClr val="990011"/>
+                </a:solidFill>
+                <a:latin typeface="Times New Roman" pitchFamily="34" charset="0"/>
+                <a:ea typeface="Times New Roman" pitchFamily="34" charset="-122"/>
+                <a:cs typeface="Times New Roman" pitchFamily="34" charset="-120"/>
+              </a:rPr>
+              <a:t>Expected Answer</a:t>
+            </a:r>
+            <a:endParaRPr lang="en-US" sz="3600" dirty="0"/>
+          </a:p>
+        </p:txBody>
+      </p:sp>
+      <p:sp>
+        <p:nvSpPr>
+          <p:cNvPr id="5" name="Text 2"/>
+          <p:cNvSpPr/>
+          <p:nvPr/>
+        </p:nvSpPr>
+        <p:spPr>
+          <a:xfrm>
+            <a:off x="5349240" y="1783080"/>
+            <a:ext cx="6522415" cy="4663440"/>
+          </a:xfrm>
+          <a:prstGeom prst="rect">
+            <a:avLst/>
+          </a:prstGeom>
+          <a:noFill/>
+          <a:ln/>
+        </p:spPr>
+        <p:txBody>
+          <a:bodyPr wrap="square" lIns="0" tIns="0" rIns="0" bIns="0" rtlCol="0" anchor="t"/>
+          <a:lstStyle/>
+          <a:p>
+            <a:pPr algn="l" indent="0" marL="0">
+              <a:spcAft>
+                <a:spcPts val="800"/>
+              </a:spcAft>
+              <a:buNone/>
+            </a:pPr>
+            <a:r>
+              <a:rPr lang="en-US" sz="4000" dirty="0">
+                <a:solidFill>
+                  <a:srgbClr val="111111"/>
+                </a:solidFill>
+                <a:latin typeface="Times New Roman" pitchFamily="34" charset="0"/>
+                <a:ea typeface="Times New Roman" pitchFamily="34" charset="-122"/>
+                <a:cs typeface="Times New Roman" pitchFamily="34" charset="-120"/>
+              </a:rPr>
+              <a:t>The Harmattan and the south-west monsoon.</a:t>
+            </a:r>
+            <a:endParaRPr lang="en-US" sz="4000" dirty="0"/>
+          </a:p>
+        </p:txBody>
+      </p:sp>
+      <p:sp>
+        <p:nvSpPr>
+          <p:cNvPr id="25" name="Slide Number Placeholder 0"/>
+          <p:cNvSpPr>
+            <a:spLocks noGrp="1"/>
+          </p:cNvSpPr>
+          <p:nvPr>
+            <p:ph type="sldNum" sz="quarter" idx="4294967295"/>
+          </p:nvPr>
+        </p:nvSpPr>
+        <p:spPr>
+          <a:xfrm>
+            <a:off x="27432" y="91440"/>
+            <a:ext cx="585216" cy="475488"/>
+          </a:xfrm>
+          <a:prstGeom prst="rect">
+            <a:avLst/>
+          </a:prstGeom>
+          <a:extLst>
+            <a:ext uri="{C572A759-6A51-4108-AA02-DFA0A04FC94B}">
+              <ma14:wrappingTextBoxFlag xmlns:ma14="http://schemas.microsoft.com/office/mac/drawingml/2011/main" val="0"/>
+            </a:ext>
+          </a:extLst>
+        </p:spPr>
+        <p:txBody>
+          <a:bodyPr/>
+          <a:lstStyle>
+            <a:lvl1pPr>
+              <a:defRPr sz="2000">
+                <a:solidFill>
+                  <a:srgbClr val="FFFFFF"/>
+                </a:solidFill>
+                <a:latin typeface="Calibri"/>
+                <a:ea typeface="Calibri"/>
+                <a:cs typeface="Calibri"/>
+              </a:defRPr>
+            </a:lvl1pPr>
+          </a:lstStyle>
+          <a:p>
+            <a:pPr algn="ctr"/>
+            <a:fld id="{F7021451-1387-4CA6-816F-3879F97B5CBC}" type="slidenum">
+              <a:rPr b="1" lang="en-US"/>
+              <a:t>47</a:t>
+            </a:fld>
+            <a:endParaRPr lang="en-US"/>
+          </a:p>
+        </p:txBody>
+      </p:sp>
+    </p:spTree>
+  </p:cSld>
+  <p:clrMapOvr>
+    <a:masterClrMapping/>
+  </p:clrMapOvr>
+</p:sld>
+</file>
+
+<file path=ppt/slides/slide48.xml><?xml version="1.0" encoding="utf-8"?>
+<p:sld xmlns:a="http://schemas.openxmlformats.org/drawingml/2006/main" xmlns:r="http://schemas.openxmlformats.org/officeDocument/2006/relationships" xmlns:p="http://schemas.openxmlformats.org/presentationml/2006/main">
+  <p:cSld name="Slide 48">
+    <p:spTree>
+      <p:nvGrpSpPr>
+        <p:cNvPr id="1" name=""/>
+        <p:cNvGrpSpPr/>
+        <p:nvPr/>
+      </p:nvGrpSpPr>
+      <p:grpSpPr>
+        <a:xfrm>
+          <a:off x="0" y="0"/>
+          <a:ext cx="0" cy="0"/>
+          <a:chOff x="0" y="0"/>
+          <a:chExt cx="0" cy="0"/>
+        </a:xfrm>
+      </p:grpSpPr>
+      <p:sp>
+        <p:nvSpPr>
+          <p:cNvPr id="2" name="Text 0"/>
+          <p:cNvSpPr/>
+          <p:nvPr/>
+        </p:nvSpPr>
+        <p:spPr>
+          <a:xfrm>
+            <a:off x="457200" y="713232"/>
+            <a:ext cx="11368735" cy="274320"/>
+          </a:xfrm>
+          <a:prstGeom prst="rect">
+            <a:avLst/>
+          </a:prstGeom>
+          <a:noFill/>
+          <a:ln/>
+        </p:spPr>
+        <p:txBody>
+          <a:bodyPr wrap="square" lIns="0" tIns="0" rIns="0" bIns="0" rtlCol="0" anchor="ctr"/>
+          <a:lstStyle/>
+          <a:p>
+            <a:pPr algn="r" indent="0" marL="0">
+              <a:buNone/>
+            </a:pPr>
+            <a:r>
+              <a:rPr lang="en-US" sz="1400" b="1" dirty="0">
+                <a:solidFill>
+                  <a:srgbClr val="1C3F6E"/>
+                </a:solidFill>
+                <a:latin typeface="Calibri" pitchFamily="34" charset="0"/>
+                <a:ea typeface="Calibri" pitchFamily="34" charset="-122"/>
+                <a:cs typeface="Calibri" pitchFamily="34" charset="-120"/>
+              </a:rPr>
+              <a:t>REMEDIATION</a:t>
+            </a:r>
+            <a:endParaRPr lang="en-US" sz="1400" dirty="0"/>
+          </a:p>
+        </p:txBody>
+      </p:sp>
+      <p:pic>
+        <p:nvPicPr>
+          <p:cNvPr id="3" name="Image 0" descr="/home/claude/f4/img/minesec_sheet.png">    </p:cNvPr>
+          <p:cNvPicPr>
+            <a:picLocks noChangeAspect="1"/>
+          </p:cNvPicPr>
+          <p:nvPr/>
+        </p:nvPicPr>
+        <p:blipFill>
+          <a:blip r:embed="rId1"/>
+          <a:stretch>
+            <a:fillRect/>
+          </a:stretch>
+        </p:blipFill>
+        <p:spPr>
+          <a:xfrm>
+            <a:off x="0" y="658368"/>
+            <a:ext cx="2468880" cy="5833872"/>
+          </a:xfrm>
+          <a:prstGeom prst="rect">
+            <a:avLst/>
+          </a:prstGeom>
+        </p:spPr>
+      </p:pic>
+      <p:sp>
+        <p:nvSpPr>
+          <p:cNvPr id="4" name="Text 1"/>
+          <p:cNvSpPr/>
+          <p:nvPr/>
+        </p:nvSpPr>
+        <p:spPr>
+          <a:xfrm>
+            <a:off x="2697480" y="1005840"/>
+            <a:ext cx="9174175" cy="731520"/>
+          </a:xfrm>
+          <a:prstGeom prst="rect">
+            <a:avLst/>
+          </a:prstGeom>
+          <a:noFill/>
+          <a:ln/>
+        </p:spPr>
+        <p:txBody>
+          <a:bodyPr wrap="square" lIns="0" tIns="0" rIns="0" bIns="0" rtlCol="0" anchor="ctr">
+            <a:normAutofit/>
+          </a:bodyPr>
+          <a:lstStyle/>
+          <a:p>
+            <a:pPr algn="ctr" indent="0" marL="0">
+              <a:buNone/>
+            </a:pPr>
+            <a:r>
+              <a:rPr lang="en-US" sz="3600" b="1" dirty="0">
+                <a:solidFill>
+                  <a:srgbClr val="990011"/>
+                </a:solidFill>
+                <a:latin typeface="Times New Roman" pitchFamily="34" charset="0"/>
+                <a:ea typeface="Times New Roman" pitchFamily="34" charset="-122"/>
+                <a:cs typeface="Times New Roman" pitchFamily="34" charset="-120"/>
+              </a:rPr>
+              <a:t>Remediation</a:t>
+            </a:r>
+            <a:endParaRPr lang="en-US" sz="3600" dirty="0"/>
+          </a:p>
+        </p:txBody>
+      </p:sp>
+      <p:sp>
+        <p:nvSpPr>
+          <p:cNvPr id="5" name="Text 2"/>
+          <p:cNvSpPr/>
+          <p:nvPr/>
+        </p:nvSpPr>
+        <p:spPr>
+          <a:xfrm>
+            <a:off x="2697480" y="1783080"/>
+            <a:ext cx="9174175" cy="4663440"/>
+          </a:xfrm>
+          <a:prstGeom prst="rect">
+            <a:avLst/>
+          </a:prstGeom>
+          <a:noFill/>
+          <a:ln/>
+        </p:spPr>
+        <p:txBody>
+          <a:bodyPr wrap="square" lIns="0" tIns="0" rIns="0" bIns="0" rtlCol="0" anchor="t"/>
+          <a:lstStyle/>
+          <a:p>
+            <a:pPr algn="l" indent="0" marL="0">
+              <a:spcAft>
+                <a:spcPts val="800"/>
+              </a:spcAft>
+              <a:buNone/>
+            </a:pPr>
+            <a:r>
+              <a:rPr lang="en-US" sz="4000" b="1" dirty="0">
+                <a:solidFill>
+                  <a:srgbClr val="111111"/>
+                </a:solidFill>
+                <a:latin typeface="Times New Roman" pitchFamily="34" charset="0"/>
+                <a:ea typeface="Times New Roman" pitchFamily="34" charset="-122"/>
+                <a:cs typeface="Times New Roman" pitchFamily="34" charset="-120"/>
+              </a:rPr>
+              <a:t>Fill in the blanks:</a:t>
+            </a:r>
+            <a:endParaRPr lang="en-US" sz="4000" dirty="0"/>
+          </a:p>
+          <a:p>
+            <a:pPr algn="l" marL="342900" indent="-342900">
+              <a:spcAft>
+                <a:spcPts val="800"/>
+              </a:spcAft>
+              <a:buSzPct val="100000"/>
+              <a:buFont typeface="+mj-lt"/>
+              <a:buAutoNum type="arabicPeriod" startAt="1"/>
+            </a:pPr>
+            <a:r>
+              <a:rPr lang="en-US" sz="4000" dirty="0">
+                <a:solidFill>
+                  <a:srgbClr val="111111"/>
+                </a:solidFill>
+                <a:latin typeface="Times New Roman" pitchFamily="34" charset="0"/>
+                <a:ea typeface="Times New Roman" pitchFamily="34" charset="-122"/>
+                <a:cs typeface="Times New Roman" pitchFamily="34" charset="-120"/>
+              </a:rPr>
+              <a:t>Pressure is measured with a ______.</a:t>
+            </a:r>
+            <a:endParaRPr lang="en-US" sz="4000" dirty="0"/>
+          </a:p>
+          <a:p>
+            <a:pPr algn="l" marL="342900" indent="-342900">
+              <a:spcAft>
+                <a:spcPts val="800"/>
+              </a:spcAft>
+              <a:buSzPct val="100000"/>
+              <a:buFont typeface="+mj-lt"/>
+              <a:buAutoNum type="arabicPeriod" startAt="1"/>
+            </a:pPr>
+            <a:r>
+              <a:rPr lang="en-US" sz="4000" dirty="0">
+                <a:solidFill>
+                  <a:srgbClr val="111111"/>
+                </a:solidFill>
+                <a:latin typeface="Times New Roman" pitchFamily="34" charset="0"/>
+                <a:ea typeface="Times New Roman" pitchFamily="34" charset="-122"/>
+                <a:cs typeface="Times New Roman" pitchFamily="34" charset="-120"/>
+              </a:rPr>
+              <a:t>Hot rising air gives ______ pressure.</a:t>
+            </a:r>
+            <a:endParaRPr lang="en-US" sz="4000" dirty="0"/>
+          </a:p>
+          <a:p>
+            <a:pPr algn="l" marL="342900" indent="-342900">
+              <a:spcAft>
+                <a:spcPts val="800"/>
+              </a:spcAft>
+              <a:buSzPct val="100000"/>
+              <a:buFont typeface="+mj-lt"/>
+              <a:buAutoNum type="arabicPeriod" startAt="1"/>
+            </a:pPr>
+            <a:r>
+              <a:rPr lang="en-US" sz="4000" dirty="0">
+                <a:solidFill>
+                  <a:srgbClr val="111111"/>
+                </a:solidFill>
+                <a:latin typeface="Times New Roman" pitchFamily="34" charset="0"/>
+                <a:ea typeface="Times New Roman" pitchFamily="34" charset="-122"/>
+                <a:cs typeface="Times New Roman" pitchFamily="34" charset="-120"/>
+              </a:rPr>
+              <a:t>The dry wind from the Sahara is the ______.</a:t>
+            </a:r>
+            <a:endParaRPr lang="en-US" sz="4000" dirty="0"/>
+          </a:p>
+        </p:txBody>
+      </p:sp>
+      <p:sp>
+        <p:nvSpPr>
+          <p:cNvPr id="25" name="Slide Number Placeholder 0"/>
+          <p:cNvSpPr>
+            <a:spLocks noGrp="1"/>
+          </p:cNvSpPr>
+          <p:nvPr>
+            <p:ph type="sldNum" sz="quarter" idx="4294967295"/>
+          </p:nvPr>
+        </p:nvSpPr>
+        <p:spPr>
+          <a:xfrm>
+            <a:off x="27432" y="91440"/>
+            <a:ext cx="585216" cy="475488"/>
+          </a:xfrm>
+          <a:prstGeom prst="rect">
+            <a:avLst/>
+          </a:prstGeom>
+          <a:extLst>
+            <a:ext uri="{C572A759-6A51-4108-AA02-DFA0A04FC94B}">
+              <ma14:wrappingTextBoxFlag xmlns:ma14="http://schemas.microsoft.com/office/mac/drawingml/2011/main" val="0"/>
+            </a:ext>
+          </a:extLst>
+        </p:spPr>
+        <p:txBody>
+          <a:bodyPr/>
+          <a:lstStyle>
+            <a:lvl1pPr>
+              <a:defRPr sz="2000">
+                <a:solidFill>
+                  <a:srgbClr val="FFFFFF"/>
+                </a:solidFill>
+                <a:latin typeface="Calibri"/>
+                <a:ea typeface="Calibri"/>
+                <a:cs typeface="Calibri"/>
+              </a:defRPr>
+            </a:lvl1pPr>
+          </a:lstStyle>
+          <a:p>
+            <a:pPr algn="ctr"/>
+            <a:fld id="{F7021451-1387-4CA6-816F-3879F97B5CBC}" type="slidenum">
+              <a:rPr b="1" lang="en-US"/>
+              <a:t>48</a:t>
+            </a:fld>
+            <a:endParaRPr lang="en-US"/>
+          </a:p>
+        </p:txBody>
+      </p:sp>
+    </p:spTree>
+  </p:cSld>
+  <p:clrMapOvr>
+    <a:masterClrMapping/>
+  </p:clrMapOvr>
+</p:sld>
+</file>
+
+<file path=ppt/slides/slide49.xml><?xml version="1.0" encoding="utf-8"?>
+<p:sld xmlns:a="http://schemas.openxmlformats.org/drawingml/2006/main" xmlns:r="http://schemas.openxmlformats.org/officeDocument/2006/relationships" xmlns:p="http://schemas.openxmlformats.org/presentationml/2006/main">
+  <p:cSld name="Slide 49">
+    <p:spTree>
+      <p:nvGrpSpPr>
+        <p:cNvPr id="1" name=""/>
+        <p:cNvGrpSpPr/>
+        <p:nvPr/>
+      </p:nvGrpSpPr>
+      <p:grpSpPr>
+        <a:xfrm>
+          <a:off x="0" y="0"/>
+          <a:ext cx="0" cy="0"/>
+          <a:chOff x="0" y="0"/>
+          <a:chExt cx="0" cy="0"/>
+        </a:xfrm>
+      </p:grpSpPr>
+      <p:sp>
+        <p:nvSpPr>
+          <p:cNvPr id="2" name="Text 0"/>
+          <p:cNvSpPr/>
+          <p:nvPr/>
+        </p:nvSpPr>
+        <p:spPr>
+          <a:xfrm>
+            <a:off x="457200" y="713232"/>
+            <a:ext cx="11368735" cy="274320"/>
+          </a:xfrm>
+          <a:prstGeom prst="rect">
+            <a:avLst/>
+          </a:prstGeom>
+          <a:noFill/>
+          <a:ln/>
+        </p:spPr>
+        <p:txBody>
+          <a:bodyPr wrap="square" lIns="0" tIns="0" rIns="0" bIns="0" rtlCol="0" anchor="ctr"/>
+          <a:lstStyle/>
+          <a:p>
+            <a:pPr algn="r" indent="0" marL="0">
+              <a:buNone/>
+            </a:pPr>
+            <a:r>
+              <a:rPr lang="en-US" sz="1400" b="1" dirty="0">
+                <a:solidFill>
+                  <a:srgbClr val="1C3F6E"/>
+                </a:solidFill>
+                <a:latin typeface="Calibri" pitchFamily="34" charset="0"/>
+                <a:ea typeface="Calibri" pitchFamily="34" charset="-122"/>
+                <a:cs typeface="Calibri" pitchFamily="34" charset="-120"/>
+              </a:rPr>
+              <a:t>HOMEWORK</a:t>
+            </a:r>
+            <a:endParaRPr lang="en-US" sz="1400" dirty="0"/>
+          </a:p>
+        </p:txBody>
+      </p:sp>
+      <p:pic>
+        <p:nvPicPr>
+          <p:cNvPr id="3" name="Image 0" descr="/home/claude/f4/img/minesec_sheet.png">    </p:cNvPr>
+          <p:cNvPicPr>
+            <a:picLocks noChangeAspect="1"/>
+          </p:cNvPicPr>
+          <p:nvPr/>
+        </p:nvPicPr>
+        <p:blipFill>
+          <a:blip r:embed="rId1"/>
+          <a:stretch>
+            <a:fillRect/>
+          </a:stretch>
+        </p:blipFill>
+        <p:spPr>
+          <a:xfrm>
+            <a:off x="0" y="658368"/>
+            <a:ext cx="5120640" cy="5833872"/>
+          </a:xfrm>
+          <a:prstGeom prst="rect">
+            <a:avLst/>
+          </a:prstGeom>
+        </p:spPr>
+      </p:pic>
+      <p:sp>
+        <p:nvSpPr>
+          <p:cNvPr id="4" name="Text 1"/>
+          <p:cNvSpPr/>
+          <p:nvPr/>
+        </p:nvSpPr>
+        <p:spPr>
+          <a:xfrm>
+            <a:off x="5349240" y="1005840"/>
+            <a:ext cx="6522415" cy="731520"/>
+          </a:xfrm>
+          <a:prstGeom prst="rect">
+            <a:avLst/>
+          </a:prstGeom>
+          <a:noFill/>
+          <a:ln/>
+        </p:spPr>
+        <p:txBody>
+          <a:bodyPr wrap="square" lIns="0" tIns="0" rIns="0" bIns="0" rtlCol="0" anchor="ctr">
+            <a:normAutofit/>
+          </a:bodyPr>
+          <a:lstStyle/>
+          <a:p>
+            <a:pPr algn="ctr" indent="0" marL="0">
+              <a:buNone/>
+            </a:pPr>
+            <a:r>
+              <a:rPr lang="en-US" sz="3600" b="1" dirty="0">
+                <a:solidFill>
+                  <a:srgbClr val="990011"/>
+                </a:solidFill>
+                <a:latin typeface="Times New Roman" pitchFamily="34" charset="0"/>
+                <a:ea typeface="Times New Roman" pitchFamily="34" charset="-122"/>
+                <a:cs typeface="Times New Roman" pitchFamily="34" charset="-120"/>
+              </a:rPr>
+              <a:t>Homework</a:t>
+            </a:r>
+            <a:endParaRPr lang="en-US" sz="3600" dirty="0"/>
+          </a:p>
+        </p:txBody>
+      </p:sp>
+      <p:sp>
+        <p:nvSpPr>
+          <p:cNvPr id="5" name="Text 2"/>
+          <p:cNvSpPr/>
+          <p:nvPr/>
+        </p:nvSpPr>
+        <p:spPr>
+          <a:xfrm>
+            <a:off x="5349240" y="1783080"/>
+            <a:ext cx="6522415" cy="4663440"/>
+          </a:xfrm>
+          <a:prstGeom prst="rect">
+            <a:avLst/>
+          </a:prstGeom>
+          <a:noFill/>
+          <a:ln/>
+        </p:spPr>
+        <p:txBody>
+          <a:bodyPr wrap="square" lIns="0" tIns="0" rIns="0" bIns="0" rtlCol="0" anchor="t"/>
+          <a:lstStyle/>
+          <a:p>
+            <a:pPr algn="l" indent="0" marL="0">
+              <a:spcAft>
+                <a:spcPts val="800"/>
+              </a:spcAft>
+              <a:buNone/>
+            </a:pPr>
+            <a:r>
+              <a:rPr lang="en-US" sz="4000" dirty="0">
+                <a:solidFill>
+                  <a:srgbClr val="111111"/>
+                </a:solidFill>
+                <a:latin typeface="Times New Roman" pitchFamily="34" charset="0"/>
+                <a:ea typeface="Times New Roman" pitchFamily="34" charset="-122"/>
+                <a:cs typeface="Times New Roman" pitchFamily="34" charset="-120"/>
+              </a:rPr>
+              <a:t>Observe the wind for three days and write its direction and whether it is dry or moist.</a:t>
+            </a:r>
+            <a:endParaRPr lang="en-US" sz="4000" dirty="0"/>
+          </a:p>
+        </p:txBody>
+      </p:sp>
+      <p:sp>
+        <p:nvSpPr>
+          <p:cNvPr id="25" name="Slide Number Placeholder 0"/>
+          <p:cNvSpPr>
+            <a:spLocks noGrp="1"/>
+          </p:cNvSpPr>
+          <p:nvPr>
+            <p:ph type="sldNum" sz="quarter" idx="4294967295"/>
+          </p:nvPr>
+        </p:nvSpPr>
+        <p:spPr>
+          <a:xfrm>
+            <a:off x="27432" y="91440"/>
+            <a:ext cx="585216" cy="475488"/>
+          </a:xfrm>
+          <a:prstGeom prst="rect">
+            <a:avLst/>
+          </a:prstGeom>
+          <a:extLst>
+            <a:ext uri="{C572A759-6A51-4108-AA02-DFA0A04FC94B}">
+              <ma14:wrappingTextBoxFlag xmlns:ma14="http://schemas.microsoft.com/office/mac/drawingml/2011/main" val="0"/>
+            </a:ext>
+          </a:extLst>
+        </p:spPr>
+        <p:txBody>
+          <a:bodyPr/>
+          <a:lstStyle>
+            <a:lvl1pPr>
+              <a:defRPr sz="2000">
+                <a:solidFill>
+                  <a:srgbClr val="FFFFFF"/>
+                </a:solidFill>
+                <a:latin typeface="Calibri"/>
+                <a:ea typeface="Calibri"/>
+                <a:cs typeface="Calibri"/>
+              </a:defRPr>
+            </a:lvl1pPr>
+          </a:lstStyle>
+          <a:p>
+            <a:pPr algn="ctr"/>
+            <a:fld id="{F7021451-1387-4CA6-816F-3879F97B5CBC}" type="slidenum">
+              <a:rPr b="1" lang="en-US"/>
+              <a:t>49</a:t>
+            </a:fld>
+            <a:endParaRPr lang="en-US"/>
+          </a:p>
+        </p:txBody>
+      </p:sp>
+    </p:spTree>
+  </p:cSld>
+  <p:clrMapOvr>
+    <a:masterClrMapping/>
+  </p:clrMapOvr>
+</p:sld>
+</file>
+
+<file path=ppt/slides/slide5.xml><?xml version="1.0" encoding="utf-8"?>
+<p:sld xmlns:a="http://schemas.openxmlformats.org/drawingml/2006/main" xmlns:r="http://schemas.openxmlformats.org/officeDocument/2006/relationships" xmlns:p="http://schemas.openxmlformats.org/presentationml/2006/main">
+  <p:cSld name="Slide 5">
+    <p:spTree>
+      <p:nvGrpSpPr>
+        <p:cNvPr id="1" name=""/>
+        <p:cNvGrpSpPr/>
+        <p:nvPr/>
+      </p:nvGrpSpPr>
+      <p:grpSpPr>
+        <a:xfrm>
+          <a:off x="0" y="0"/>
+          <a:ext cx="0" cy="0"/>
+          <a:chOff x="0" y="0"/>
+          <a:chExt cx="0" cy="0"/>
+        </a:xfrm>
+      </p:grpSpPr>
+      <p:sp>
+        <p:nvSpPr>
+          <p:cNvPr id="2" name="Text 0"/>
+          <p:cNvSpPr/>
+          <p:nvPr/>
+        </p:nvSpPr>
+        <p:spPr>
+          <a:xfrm>
+            <a:off x="457200" y="713232"/>
+            <a:ext cx="11368735" cy="274320"/>
+          </a:xfrm>
+          <a:prstGeom prst="rect">
+            <a:avLst/>
+          </a:prstGeom>
+          <a:noFill/>
+          <a:ln/>
+        </p:spPr>
+        <p:txBody>
+          <a:bodyPr wrap="square" lIns="0" tIns="0" rIns="0" bIns="0" rtlCol="0" anchor="ctr"/>
+          <a:lstStyle/>
+          <a:p>
+            <a:pPr algn="r" indent="0" marL="0">
+              <a:buNone/>
+            </a:pPr>
+            <a:r>
+              <a:rPr lang="en-US" sz="1400" b="1" dirty="0">
+                <a:solidFill>
+                  <a:srgbClr val="1C3F6E"/>
+                </a:solidFill>
+                <a:latin typeface="Calibri" pitchFamily="34" charset="0"/>
+                <a:ea typeface="Calibri" pitchFamily="34" charset="-122"/>
+                <a:cs typeface="Calibri" pitchFamily="34" charset="-120"/>
+              </a:rPr>
+              <a:t>HOMEWORK CORRECTION</a:t>
+            </a:r>
+            <a:endParaRPr lang="en-US" sz="1400" dirty="0"/>
+          </a:p>
+        </p:txBody>
+      </p:sp>
+      <p:pic>
+        <p:nvPicPr>
+          <p:cNvPr id="3" name="Image 0" descr="/home/claude/f4/img/minesec_sheet.png">    </p:cNvPr>
+          <p:cNvPicPr>
+            <a:picLocks noChangeAspect="1"/>
+          </p:cNvPicPr>
+          <p:nvPr/>
+        </p:nvPicPr>
+        <p:blipFill>
+          <a:blip r:embed="rId1"/>
+          <a:stretch>
+            <a:fillRect/>
+          </a:stretch>
+        </p:blipFill>
+        <p:spPr>
+          <a:xfrm>
+            <a:off x="0" y="658368"/>
+            <a:ext cx="5120640" cy="5833872"/>
+          </a:xfrm>
+          <a:prstGeom prst="rect">
+            <a:avLst/>
+          </a:prstGeom>
+        </p:spPr>
+      </p:pic>
+      <p:sp>
+        <p:nvSpPr>
+          <p:cNvPr id="4" name="Text 1"/>
+          <p:cNvSpPr/>
+          <p:nvPr/>
+        </p:nvSpPr>
+        <p:spPr>
+          <a:xfrm>
+            <a:off x="5349240" y="1005840"/>
+            <a:ext cx="6522415" cy="731520"/>
+          </a:xfrm>
+          <a:prstGeom prst="rect">
+            <a:avLst/>
+          </a:prstGeom>
+          <a:noFill/>
+          <a:ln/>
+        </p:spPr>
+        <p:txBody>
+          <a:bodyPr wrap="square" lIns="0" tIns="0" rIns="0" bIns="0" rtlCol="0" anchor="ctr">
+            <a:normAutofit/>
+          </a:bodyPr>
+          <a:lstStyle/>
+          <a:p>
+            <a:pPr algn="ctr" indent="0" marL="0">
+              <a:buNone/>
+            </a:pPr>
+            <a:r>
+              <a:rPr lang="en-US" sz="3600" b="1" dirty="0">
+                <a:solidFill>
+                  <a:srgbClr val="990011"/>
+                </a:solidFill>
+                <a:latin typeface="Times New Roman" pitchFamily="34" charset="0"/>
+                <a:ea typeface="Times New Roman" pitchFamily="34" charset="-122"/>
+                <a:cs typeface="Times New Roman" pitchFamily="34" charset="-120"/>
+              </a:rPr>
+              <a:t>Correction: Possible Answer</a:t>
+            </a:r>
+            <a:endParaRPr lang="en-US" sz="3600" dirty="0"/>
+          </a:p>
+        </p:txBody>
+      </p:sp>
+      <p:sp>
+        <p:nvSpPr>
+          <p:cNvPr id="5" name="Text 2"/>
+          <p:cNvSpPr/>
+          <p:nvPr/>
+        </p:nvSpPr>
+        <p:spPr>
+          <a:xfrm>
+            <a:off x="5349240" y="1783080"/>
+            <a:ext cx="6522415" cy="4663440"/>
+          </a:xfrm>
+          <a:prstGeom prst="rect">
+            <a:avLst/>
+          </a:prstGeom>
+          <a:noFill/>
+          <a:ln/>
+        </p:spPr>
+        <p:txBody>
+          <a:bodyPr wrap="square" lIns="0" tIns="0" rIns="0" bIns="0" rtlCol="0" anchor="t"/>
+          <a:lstStyle/>
+          <a:p>
+            <a:pPr algn="l" indent="0" marL="0">
+              <a:spcAft>
+                <a:spcPts val="800"/>
+              </a:spcAft>
+              <a:buNone/>
+            </a:pPr>
+            <a:r>
+              <a:rPr lang="en-US" sz="4000" dirty="0">
+                <a:solidFill>
+                  <a:srgbClr val="111111"/>
+                </a:solidFill>
+                <a:latin typeface="Times New Roman" pitchFamily="34" charset="0"/>
+                <a:ea typeface="Times New Roman" pitchFamily="34" charset="-122"/>
+                <a:cs typeface="Times New Roman" pitchFamily="34" charset="-120"/>
+              </a:rPr>
+              <a:t>From the ground: troposphere (0–12 km, weather), stratosphere (12–50 km, ozone layer), mesosphere (50–85 km), thermosphere (above 85 km).</a:t>
+            </a:r>
+            <a:endParaRPr lang="en-US" sz="4000" dirty="0"/>
+          </a:p>
+        </p:txBody>
+      </p:sp>
+      <p:sp>
+        <p:nvSpPr>
+          <p:cNvPr id="25" name="Slide Number Placeholder 0"/>
+          <p:cNvSpPr>
+            <a:spLocks noGrp="1"/>
+          </p:cNvSpPr>
+          <p:nvPr>
+            <p:ph type="sldNum" sz="quarter" idx="4294967295"/>
+          </p:nvPr>
+        </p:nvSpPr>
+        <p:spPr>
+          <a:xfrm>
+            <a:off x="27432" y="91440"/>
+            <a:ext cx="585216" cy="475488"/>
+          </a:xfrm>
+          <a:prstGeom prst="rect">
+            <a:avLst/>
+          </a:prstGeom>
+          <a:extLst>
+            <a:ext uri="{C572A759-6A51-4108-AA02-DFA0A04FC94B}">
+              <ma14:wrappingTextBoxFlag xmlns:ma14="http://schemas.microsoft.com/office/mac/drawingml/2011/main" val="0"/>
+            </a:ext>
+          </a:extLst>
+        </p:spPr>
+        <p:txBody>
+          <a:bodyPr/>
+          <a:lstStyle>
+            <a:lvl1pPr>
+              <a:defRPr sz="2000">
+                <a:solidFill>
+                  <a:srgbClr val="FFFFFF"/>
+                </a:solidFill>
+                <a:latin typeface="Calibri"/>
+                <a:ea typeface="Calibri"/>
+                <a:cs typeface="Calibri"/>
+              </a:defRPr>
+            </a:lvl1pPr>
+          </a:lstStyle>
+          <a:p>
+            <a:pPr algn="ctr"/>
+            <a:fld id="{F7021451-1387-4CA6-816F-3879F97B5CBC}" type="slidenum">
+              <a:rPr b="1" lang="en-US"/>
+              <a:t>5</a:t>
+            </a:fld>
+            <a:endParaRPr lang="en-US"/>
+          </a:p>
+        </p:txBody>
+      </p:sp>
+    </p:spTree>
+  </p:cSld>
+  <p:clrMapOvr>
+    <a:masterClrMapping/>
+  </p:clrMapOvr>
+</p:sld>
+</file>
+
+<file path=ppt/slides/slide50.xml><?xml version="1.0" encoding="utf-8"?>
+<p:sld xmlns:a="http://schemas.openxmlformats.org/drawingml/2006/main" xmlns:r="http://schemas.openxmlformats.org/officeDocument/2006/relationships" xmlns:p="http://schemas.openxmlformats.org/presentationml/2006/main">
+  <p:cSld name="Slide 50">
+    <p:spTree>
+      <p:nvGrpSpPr>
+        <p:cNvPr id="1" name=""/>
+        <p:cNvGrpSpPr/>
+        <p:nvPr/>
+      </p:nvGrpSpPr>
+      <p:grpSpPr>
+        <a:xfrm>
+          <a:off x="0" y="0"/>
+          <a:ext cx="0" cy="0"/>
+          <a:chOff x="0" y="0"/>
+          <a:chExt cx="0" cy="0"/>
+        </a:xfrm>
+      </p:grpSpPr>
+      <p:sp>
+        <p:nvSpPr>
+          <p:cNvPr id="2" name="Text 0"/>
+          <p:cNvSpPr/>
+          <p:nvPr/>
+        </p:nvSpPr>
+        <p:spPr>
+          <a:xfrm>
+            <a:off x="457200" y="713232"/>
+            <a:ext cx="11368735" cy="274320"/>
+          </a:xfrm>
+          <a:prstGeom prst="rect">
+            <a:avLst/>
+          </a:prstGeom>
+          <a:noFill/>
+          <a:ln/>
+        </p:spPr>
+        <p:txBody>
+          <a:bodyPr wrap="square" lIns="0" tIns="0" rIns="0" bIns="0" rtlCol="0" anchor="ctr"/>
+          <a:lstStyle/>
+          <a:p>
+            <a:pPr algn="r" indent="0" marL="0">
+              <a:buNone/>
+            </a:pPr>
+            <a:r>
+              <a:rPr lang="en-US" sz="1400" b="1" dirty="0">
+                <a:solidFill>
+                  <a:srgbClr val="1C3F6E"/>
+                </a:solidFill>
+                <a:latin typeface="Calibri" pitchFamily="34" charset="0"/>
+                <a:ea typeface="Calibri" pitchFamily="34" charset="-122"/>
+                <a:cs typeface="Calibri" pitchFamily="34" charset="-120"/>
+              </a:rPr>
+              <a:t>NEXT LESSON</a:t>
+            </a:r>
+            <a:endParaRPr lang="en-US" sz="1400" dirty="0"/>
+          </a:p>
+        </p:txBody>
+      </p:sp>
+      <p:pic>
+        <p:nvPicPr>
+          <p:cNvPr id="3" name="Image 0" descr="/home/claude/f4/img/minesec_sheet.png">    </p:cNvPr>
+          <p:cNvPicPr>
+            <a:picLocks noChangeAspect="1"/>
+          </p:cNvPicPr>
+          <p:nvPr/>
+        </p:nvPicPr>
+        <p:blipFill>
+          <a:blip r:embed="rId1"/>
+          <a:stretch>
+            <a:fillRect/>
+          </a:stretch>
+        </p:blipFill>
+        <p:spPr>
+          <a:xfrm>
+            <a:off x="0" y="658368"/>
+            <a:ext cx="5120640" cy="5833872"/>
+          </a:xfrm>
+          <a:prstGeom prst="rect">
+            <a:avLst/>
+          </a:prstGeom>
+        </p:spPr>
+      </p:pic>
+      <p:sp>
+        <p:nvSpPr>
+          <p:cNvPr id="4" name="Text 1"/>
+          <p:cNvSpPr/>
+          <p:nvPr/>
+        </p:nvSpPr>
+        <p:spPr>
+          <a:xfrm>
+            <a:off x="5349240" y="1005840"/>
+            <a:ext cx="6522415" cy="731520"/>
+          </a:xfrm>
+          <a:prstGeom prst="rect">
+            <a:avLst/>
+          </a:prstGeom>
+          <a:noFill/>
+          <a:ln/>
+        </p:spPr>
+        <p:txBody>
+          <a:bodyPr wrap="square" lIns="0" tIns="0" rIns="0" bIns="0" rtlCol="0" anchor="ctr">
+            <a:normAutofit/>
+          </a:bodyPr>
+          <a:lstStyle/>
+          <a:p>
+            <a:pPr algn="ctr" indent="0" marL="0">
+              <a:buNone/>
+            </a:pPr>
+            <a:r>
+              <a:rPr lang="en-US" sz="3600" b="1" dirty="0">
+                <a:solidFill>
+                  <a:srgbClr val="990011"/>
+                </a:solidFill>
+                <a:latin typeface="Times New Roman" pitchFamily="34" charset="0"/>
+                <a:ea typeface="Times New Roman" pitchFamily="34" charset="-122"/>
+                <a:cs typeface="Times New Roman" pitchFamily="34" charset="-120"/>
+              </a:rPr>
+              <a:t>Next Lesson</a:t>
+            </a:r>
+            <a:endParaRPr lang="en-US" sz="3600" dirty="0"/>
+          </a:p>
+        </p:txBody>
+      </p:sp>
+      <p:sp>
+        <p:nvSpPr>
+          <p:cNvPr id="5" name="Text 2"/>
+          <p:cNvSpPr/>
+          <p:nvPr/>
+        </p:nvSpPr>
+        <p:spPr>
+          <a:xfrm>
+            <a:off x="5349240" y="1783080"/>
+            <a:ext cx="6522415" cy="4663440"/>
+          </a:xfrm>
+          <a:prstGeom prst="rect">
+            <a:avLst/>
+          </a:prstGeom>
+          <a:noFill/>
+          <a:ln/>
+        </p:spPr>
+        <p:txBody>
+          <a:bodyPr wrap="square" lIns="0" tIns="0" rIns="0" bIns="0" rtlCol="0" anchor="ctr"/>
+          <a:lstStyle/>
+          <a:p>
+            <a:pPr algn="ctr" indent="0" marL="0">
+              <a:spcAft>
+                <a:spcPts val="800"/>
+              </a:spcAft>
+              <a:buNone/>
+            </a:pPr>
+            <a:r>
+              <a:rPr lang="en-US" sz="4000" b="1" dirty="0">
+                <a:solidFill>
+                  <a:srgbClr val="111111"/>
+                </a:solidFill>
+                <a:latin typeface="Times New Roman" pitchFamily="34" charset="0"/>
+                <a:ea typeface="Times New Roman" pitchFamily="34" charset="-122"/>
+                <a:cs typeface="Times New Roman" pitchFamily="34" charset="-120"/>
+              </a:rPr>
+              <a:t>Our next lesson will be on:</a:t>
+            </a:r>
+            <a:endParaRPr lang="en-US" sz="4000" dirty="0"/>
+          </a:p>
+          <a:p>
+            <a:pPr algn="ctr" indent="0" marL="0">
+              <a:spcAft>
+                <a:spcPts val="800"/>
+              </a:spcAft>
+              <a:buNone/>
+            </a:pPr>
+            <a:r>
+              <a:rPr lang="en-US" sz="4000" b="1" dirty="0">
+                <a:solidFill>
+                  <a:srgbClr val="990011"/>
+                </a:solidFill>
+                <a:latin typeface="Times New Roman" pitchFamily="34" charset="0"/>
+                <a:ea typeface="Times New Roman" pitchFamily="34" charset="-122"/>
+                <a:cs typeface="Times New Roman" pitchFamily="34" charset="-120"/>
+              </a:rPr>
+              <a:t>Lesson 9: Atmospheric Disturbances</a:t>
+            </a:r>
+            <a:endParaRPr lang="en-US" sz="4000" dirty="0"/>
+          </a:p>
+        </p:txBody>
+      </p:sp>
+      <p:sp>
+        <p:nvSpPr>
+          <p:cNvPr id="25" name="Slide Number Placeholder 0"/>
+          <p:cNvSpPr>
+            <a:spLocks noGrp="1"/>
+          </p:cNvSpPr>
+          <p:nvPr>
+            <p:ph type="sldNum" sz="quarter" idx="4294967295"/>
+          </p:nvPr>
+        </p:nvSpPr>
+        <p:spPr>
+          <a:xfrm>
+            <a:off x="27432" y="91440"/>
+            <a:ext cx="585216" cy="475488"/>
+          </a:xfrm>
+          <a:prstGeom prst="rect">
+            <a:avLst/>
+          </a:prstGeom>
+          <a:extLst>
+            <a:ext uri="{C572A759-6A51-4108-AA02-DFA0A04FC94B}">
+              <ma14:wrappingTextBoxFlag xmlns:ma14="http://schemas.microsoft.com/office/mac/drawingml/2011/main" val="0"/>
+            </a:ext>
+          </a:extLst>
+        </p:spPr>
+        <p:txBody>
+          <a:bodyPr/>
+          <a:lstStyle>
+            <a:lvl1pPr>
+              <a:defRPr sz="2000">
+                <a:solidFill>
+                  <a:srgbClr val="FFFFFF"/>
+                </a:solidFill>
+                <a:latin typeface="Calibri"/>
+                <a:ea typeface="Calibri"/>
+                <a:cs typeface="Calibri"/>
+              </a:defRPr>
+            </a:lvl1pPr>
+          </a:lstStyle>
+          <a:p>
+            <a:pPr algn="ctr"/>
+            <a:fld id="{F7021451-1387-4CA6-816F-3879F97B5CBC}" type="slidenum">
+              <a:rPr b="1" lang="en-US"/>
+              <a:t>50</a:t>
+            </a:fld>
+            <a:endParaRPr lang="en-US"/>
+          </a:p>
+        </p:txBody>
+      </p:sp>
+    </p:spTree>
+  </p:cSld>
+  <p:clrMapOvr>
+    <a:masterClrMapping/>
+  </p:clrMapOvr>
+</p:sld>
+</file>
+
+<file path=ppt/slides/slide51.xml><?xml version="1.0" encoding="utf-8"?>
+<p:sld xmlns:a="http://schemas.openxmlformats.org/drawingml/2006/main" xmlns:r="http://schemas.openxmlformats.org/officeDocument/2006/relationships" xmlns:p="http://schemas.openxmlformats.org/presentationml/2006/main">
+  <p:cSld name="Slide 51">
+    <p:spTree>
+      <p:nvGrpSpPr>
+        <p:cNvPr id="1" name=""/>
+        <p:cNvGrpSpPr/>
+        <p:nvPr/>
+      </p:nvGrpSpPr>
+      <p:grpSpPr>
+        <a:xfrm>
+          <a:off x="0" y="0"/>
+          <a:ext cx="0" cy="0"/>
+          <a:chOff x="0" y="0"/>
+          <a:chExt cx="0" cy="0"/>
+        </a:xfrm>
+      </p:grpSpPr>
+      <p:sp>
+        <p:nvSpPr>
+          <p:cNvPr id="2" name="Text 0"/>
+          <p:cNvSpPr/>
+          <p:nvPr/>
+        </p:nvSpPr>
+        <p:spPr>
+          <a:xfrm>
+            <a:off x="457200" y="713232"/>
+            <a:ext cx="11368735" cy="274320"/>
+          </a:xfrm>
+          <a:prstGeom prst="rect">
+            <a:avLst/>
+          </a:prstGeom>
+          <a:noFill/>
+          <a:ln/>
+        </p:spPr>
+        <p:txBody>
+          <a:bodyPr wrap="square" lIns="0" tIns="0" rIns="0" bIns="0" rtlCol="0" anchor="ctr"/>
+          <a:lstStyle/>
+          <a:p>
+            <a:pPr algn="r" indent="0" marL="0">
+              <a:buNone/>
+            </a:pPr>
+            <a:r>
+              <a:rPr lang="en-US" sz="1400" b="1" dirty="0">
+                <a:solidFill>
+                  <a:srgbClr val="1C3F6E"/>
+                </a:solidFill>
+                <a:latin typeface="Calibri" pitchFamily="34" charset="0"/>
+                <a:ea typeface="Calibri" pitchFamily="34" charset="-122"/>
+                <a:cs typeface="Calibri" pitchFamily="34" charset="-120"/>
+              </a:rPr>
               <a:t>BILINGUAL GAME</a:t>
             </a:r>
             <a:endParaRPr lang="en-US" sz="1400" dirty="0"/>
@@ -16366,7 +18392,7 @@
       </p:sp>
       <p:graphicFrame>
         <p:nvGraphicFramePr>
-          <p:cNvPr id="47" name="Table 0"/>
+          <p:cNvPr id="52" name="Table 0"/>
           <p:cNvGraphicFramePr>
             <a:graphicFrameLocks noGrp="1"/>
           </p:cNvGraphicFramePr>
@@ -17402,7 +19428,7 @@
             <a:pPr algn="ctr"/>
             <a:fld id="{F7021451-1387-4CA6-816F-3879F97B5CBC}" type="slidenum">
               <a:rPr b="1" lang="en-US"/>
-              <a:t>46</a:t>
+              <a:t>51</a:t>
             </a:fld>
             <a:endParaRPr lang="en-US"/>
           </a:p>
@@ -17416,9 +19442,9 @@
 </p:sld>
 </file>
 
-<file path=ppt/slides/slide47.xml><?xml version="1.0" encoding="utf-8"?>
+<file path=ppt/slides/slide52.xml><?xml version="1.0" encoding="utf-8"?>
 <p:sld xmlns:a="http://schemas.openxmlformats.org/drawingml/2006/main" xmlns:r="http://schemas.openxmlformats.org/officeDocument/2006/relationships" xmlns:p="http://schemas.openxmlformats.org/presentationml/2006/main">
-  <p:cSld name="Slide 47">
+  <p:cSld name="Slide 52">
     <p:spTree>
       <p:nvGrpSpPr>
         <p:cNvPr id="1" name=""/>
@@ -17513,7 +19539,7 @@
       </p:sp>
       <p:graphicFrame>
         <p:nvGraphicFramePr>
-          <p:cNvPr id="48" name="Table 0"/>
+          <p:cNvPr id="53" name="Table 0"/>
           <p:cNvGraphicFramePr>
             <a:graphicFrameLocks noGrp="1"/>
           </p:cNvGraphicFramePr>
@@ -17899,7 +19925,7 @@
                           <a:ea typeface="Calibri" pitchFamily="34" charset="-122"/>
                           <a:cs typeface="Calibri" pitchFamily="34" charset="-120"/>
                         </a:rPr>
-                        <a:t>Define atmospheric pressure. Distinguish high and low pressure. Describe the pressure belts and the planetary winds.</a:t>
+                        <a:t>Define atmospheric pressure. Distinguish high and low pressure. Describe the pressure belts and the winds.</a:t>
                       </a:r>
                       <a:endParaRPr lang="en-US" sz="1600" dirty="0">
                         <a:latin typeface="Calibri" charset="0"/>
@@ -18135,7 +20161,7 @@
             <a:pPr algn="ctr"/>
             <a:fld id="{F7021451-1387-4CA6-816F-3879F97B5CBC}" type="slidenum">
               <a:rPr b="1" lang="en-US"/>
-              <a:t>47</a:t>
+              <a:t>52</a:t>
             </a:fld>
             <a:endParaRPr lang="en-US"/>
           </a:p>
@@ -18149,9 +20175,9 @@
 </p:sld>
 </file>
 
-<file path=ppt/slides/slide48.xml><?xml version="1.0" encoding="utf-8"?>
+<file path=ppt/slides/slide53.xml><?xml version="1.0" encoding="utf-8"?>
 <p:sld xmlns:a="http://schemas.openxmlformats.org/drawingml/2006/main" xmlns:r="http://schemas.openxmlformats.org/officeDocument/2006/relationships" xmlns:p="http://schemas.openxmlformats.org/presentationml/2006/main">
-  <p:cSld name="Slide 48">
+  <p:cSld name="Slide 53">
     <p:spTree>
       <p:nvGrpSpPr>
         <p:cNvPr id="1" name=""/>
@@ -18246,7 +20272,7 @@
       </p:sp>
       <p:graphicFrame>
         <p:nvGraphicFramePr>
-          <p:cNvPr id="49" name="Table 0"/>
+          <p:cNvPr id="54" name="Table 0"/>
           <p:cNvGraphicFramePr>
             <a:graphicFrameLocks noGrp="1"/>
           </p:cNvGraphicFramePr>
@@ -18356,7 +20382,7 @@
                           <a:ea typeface="Calibri" pitchFamily="34" charset="-122"/>
                           <a:cs typeface="Calibri" pitchFamily="34" charset="-120"/>
                         </a:rPr>
-                        <a:t>DEFINITIONS; Types of Pressure; Pressure Belts and Winds.</a:t>
+                        <a:t>DEFINITIONS; Types of Pressure; Winds and Pressure Belts.</a:t>
                       </a:r>
                       <a:endParaRPr lang="en-US" sz="1600" dirty="0">
                         <a:latin typeface="Calibri" charset="0"/>
@@ -19006,7 +21032,7 @@
             <a:pPr algn="ctr"/>
             <a:fld id="{F7021451-1387-4CA6-816F-3879F97B5CBC}" type="slidenum">
               <a:rPr b="1" lang="en-US"/>
-              <a:t>48</a:t>
+              <a:t>53</a:t>
             </a:fld>
             <a:endParaRPr lang="en-US"/>
           </a:p>
@@ -19020,9 +21046,9 @@
 </p:sld>
 </file>
 
-<file path=ppt/slides/slide49.xml><?xml version="1.0" encoding="utf-8"?>
+<file path=ppt/slides/slide54.xml><?xml version="1.0" encoding="utf-8"?>
 <p:sld xmlns:a="http://schemas.openxmlformats.org/drawingml/2006/main" xmlns:r="http://schemas.openxmlformats.org/officeDocument/2006/relationships" xmlns:p="http://schemas.openxmlformats.org/presentationml/2006/main">
-  <p:cSld name="Slide 49">
+  <p:cSld name="Slide 54">
     <p:spTree>
       <p:nvGrpSpPr>
         <p:cNvPr id="1" name=""/>
@@ -19352,7 +21378,7 @@
             <a:pPr algn="ctr"/>
             <a:fld id="{F7021451-1387-4CA6-816F-3879F97B5CBC}" type="slidenum">
               <a:rPr b="1" lang="en-US"/>
-              <a:t>49</a:t>
+              <a:t>54</a:t>
             </a:fld>
             <a:endParaRPr lang="en-US"/>
           </a:p>
@@ -19366,9 +21392,9 @@
 </p:sld>
 </file>
 
-<file path=ppt/slides/slide5.xml><?xml version="1.0" encoding="utf-8"?>
+<file path=ppt/slides/slide55.xml><?xml version="1.0" encoding="utf-8"?>
 <p:sld xmlns:a="http://schemas.openxmlformats.org/drawingml/2006/main" xmlns:r="http://schemas.openxmlformats.org/officeDocument/2006/relationships" xmlns:p="http://schemas.openxmlformats.org/presentationml/2006/main">
-  <p:cSld name="Slide 5">
+  <p:cSld name="Slide 55">
     <p:spTree>
       <p:nvGrpSpPr>
         <p:cNvPr id="1" name=""/>
@@ -19416,7 +21442,7 @@
                 <a:ea typeface="Calibri" pitchFamily="34" charset="-122"/>
                 <a:cs typeface="Calibri" pitchFamily="34" charset="-120"/>
               </a:rPr>
-              <a:t>HOMEWORK CORRECTION</a:t>
+              <a:t>REFERENCES</a:t>
             </a:r>
             <a:endParaRPr lang="en-US" sz="1400" dirty="0"/>
           </a:p>
@@ -19439,7 +21465,7 @@
         <p:spPr>
           <a:xfrm>
             <a:off x="0" y="658368"/>
-            <a:ext cx="5120640" cy="5833872"/>
+            <a:ext cx="2468880" cy="5833872"/>
           </a:xfrm>
           <a:prstGeom prst="rect">
             <a:avLst/>
@@ -19454,8 +21480,8 @@
         </p:nvSpPr>
         <p:spPr>
           <a:xfrm>
-            <a:off x="5349240" y="1005840"/>
-            <a:ext cx="6522415" cy="731520"/>
+            <a:off x="2697480" y="1005840"/>
+            <a:ext cx="9174175" cy="731520"/>
           </a:xfrm>
           <a:prstGeom prst="rect">
             <a:avLst/>
@@ -19481,7 +21507,7 @@
                 <a:ea typeface="Times New Roman" pitchFamily="34" charset="-122"/>
                 <a:cs typeface="Times New Roman" pitchFamily="34" charset="-120"/>
               </a:rPr>
-              <a:t>Correction: Possible Answer</a:t>
+              <a:t>References</a:t>
             </a:r>
             <a:endParaRPr lang="en-US" sz="3600" dirty="0"/>
           </a:p>
@@ -19495,8 +21521,8 @@
         </p:nvSpPr>
         <p:spPr>
           <a:xfrm>
-            <a:off x="5349240" y="1783080"/>
-            <a:ext cx="6522415" cy="4663440"/>
+            <a:off x="2697480" y="1783080"/>
+            <a:ext cx="9174175" cy="4663440"/>
           </a:xfrm>
           <a:prstGeom prst="rect">
             <a:avLst/>
@@ -19508,24 +21534,130 @@
           <a:bodyPr wrap="square" lIns="0" tIns="0" rIns="0" bIns="0" rtlCol="0" anchor="t"/>
           <a:lstStyle/>
           <a:p>
-            <a:pPr algn="l" indent="0" marL="0">
+            <a:pPr algn="l" marL="342900" indent="-342900">
               <a:spcAft>
                 <a:spcPts val="800"/>
               </a:spcAft>
-              <a:buNone/>
+              <a:buSzPct val="100000"/>
+              <a:buChar char="•"/>
             </a:pPr>
             <a:r>
-              <a:rPr lang="en-US" sz="4000" dirty="0">
+              <a:rPr lang="en-US" sz="1800" dirty="0">
                 <a:solidFill>
                   <a:srgbClr val="111111"/>
                 </a:solidFill>
-                <a:latin typeface="Times New Roman" pitchFamily="34" charset="0"/>
-                <a:ea typeface="Times New Roman" pitchFamily="34" charset="-122"/>
-                <a:cs typeface="Times New Roman" pitchFamily="34" charset="-120"/>
+                <a:latin typeface="Calibri" pitchFamily="34" charset="0"/>
+                <a:ea typeface="Calibri" pitchFamily="34" charset="-122"/>
+                <a:cs typeface="Calibri" pitchFamily="34" charset="-120"/>
               </a:rPr>
-              <a:t>From the ground: troposphere (0–12 km, weather), stratosphere (12–50 km, ozone layer), mesosphere (50–85 km), thermosphere (above 85 km).</a:t>
-            </a:r>
-            <a:endParaRPr lang="en-US" sz="4000" dirty="0"/>
+              <a:t>Geography Syllabus, Forms I–V, MINESEC (2023) — Form 1, Module 3: Protection from the Wrath of Nature.</a:t>
+            </a:r>
+            <a:endParaRPr lang="en-US" sz="1800" dirty="0"/>
+          </a:p>
+          <a:p>
+            <a:pPr algn="l" marL="342900" indent="-342900">
+              <a:spcAft>
+                <a:spcPts val="800"/>
+              </a:spcAft>
+              <a:buSzPct val="100000"/>
+              <a:buChar char="•"/>
+            </a:pPr>
+            <a:r>
+              <a:rPr lang="en-US" sz="1800" dirty="0">
+                <a:solidFill>
+                  <a:srgbClr val="111111"/>
+                </a:solidFill>
+                <a:latin typeface="Calibri" pitchFamily="34" charset="0"/>
+                <a:ea typeface="Calibri" pitchFamily="34" charset="-122"/>
+                <a:cs typeface="Calibri" pitchFamily="34" charset="-120"/>
+              </a:rPr>
+              <a:t>Photo, Activity 1: “Aneroid Barometer, with dial designed by Sir Napier Shaw, 1914” by Negretti &amp; Zambra; Shaw, Sir Napier, CC BY-NC-SA 4.0, via sciencemuseum (https://collection.sciencemuseumgroup.org.uk/objects/co54459/aneroid-barometer-with-dial-designed-by-sir-napier-shaw-1914)</a:t>
+            </a:r>
+            <a:endParaRPr lang="en-US" sz="1800" dirty="0"/>
+          </a:p>
+          <a:p>
+            <a:pPr algn="l" marL="342900" indent="-342900">
+              <a:spcAft>
+                <a:spcPts val="800"/>
+              </a:spcAft>
+              <a:buSzPct val="100000"/>
+              <a:buChar char="•"/>
+            </a:pPr>
+            <a:r>
+              <a:rPr lang="en-US" sz="1800" dirty="0">
+                <a:solidFill>
+                  <a:srgbClr val="111111"/>
+                </a:solidFill>
+                <a:latin typeface="Calibri" pitchFamily="34" charset="0"/>
+                <a:ea typeface="Calibri" pitchFamily="34" charset="-122"/>
+                <a:cs typeface="Calibri" pitchFamily="34" charset="-120"/>
+              </a:rPr>
+              <a:t>Photo, Activity 3: “Windsock” by Wajahat Mahmood, CC BY-SA 2.0, via Flickr (https://www.flickr.com/photos/26116471@N03/6613272897)</a:t>
+            </a:r>
+            <a:endParaRPr lang="en-US" sz="1800" dirty="0"/>
+          </a:p>
+          <a:p>
+            <a:pPr algn="l" marL="342900" indent="-342900">
+              <a:spcAft>
+                <a:spcPts val="800"/>
+              </a:spcAft>
+              <a:buSzPct val="100000"/>
+              <a:buChar char="•"/>
+            </a:pPr>
+            <a:r>
+              <a:rPr lang="en-US" sz="1800" dirty="0">
+                <a:solidFill>
+                  <a:srgbClr val="111111"/>
+                </a:solidFill>
+                <a:latin typeface="Calibri" pitchFamily="34" charset="0"/>
+                <a:ea typeface="Calibri" pitchFamily="34" charset="-122"/>
+                <a:cs typeface="Calibri" pitchFamily="34" charset="-120"/>
+              </a:rPr>
+              <a:t>Photo, Activity 5: “Bamenda sob a poeira do Harmattan” by carlosoliveirareis, CC BY-NC-SA 2.0, via Flickr (https://www.flickr.com/photos/54218923@N00/387054136)</a:t>
+            </a:r>
+            <a:endParaRPr lang="en-US" sz="1800" dirty="0"/>
+          </a:p>
+          <a:p>
+            <a:pPr algn="l" marL="342900" indent="-342900">
+              <a:spcAft>
+                <a:spcPts val="800"/>
+              </a:spcAft>
+              <a:buSzPct val="100000"/>
+              <a:buChar char="•"/>
+            </a:pPr>
+            <a:r>
+              <a:rPr lang="en-US" sz="1800" dirty="0">
+                <a:solidFill>
+                  <a:srgbClr val="111111"/>
+                </a:solidFill>
+                <a:latin typeface="Calibri" pitchFamily="34" charset="0"/>
+                <a:ea typeface="Calibri" pitchFamily="34" charset="-122"/>
+                <a:cs typeface="Calibri" pitchFamily="34" charset="-120"/>
+              </a:rPr>
+              <a:t>Photo, board summary (South-west monsoon): “Running in the rain” by VinothChandar, CC BY 2.0, via Flickr (https://www.flickr.com/photos/44345361@N06/10960940954)</a:t>
+            </a:r>
+            <a:endParaRPr lang="en-US" sz="1800" dirty="0"/>
+          </a:p>
+          <a:p>
+            <a:pPr algn="l" marL="342900" indent="-342900">
+              <a:spcAft>
+                <a:spcPts val="800"/>
+              </a:spcAft>
+              <a:buSzPct val="100000"/>
+              <a:buChar char="•"/>
+            </a:pPr>
+            <a:r>
+              <a:rPr lang="en-US" sz="1800" dirty="0">
+                <a:solidFill>
+                  <a:srgbClr val="111111"/>
+                </a:solidFill>
+                <a:latin typeface="Calibri" pitchFamily="34" charset="0"/>
+                <a:ea typeface="Calibri" pitchFamily="34" charset="-122"/>
+                <a:cs typeface="Calibri" pitchFamily="34" charset="-120"/>
+              </a:rPr>
+              <a:t>Diagrams and animations: drawn for this lesson (Geography Department).</a:t>
+            </a:r>
+            <a:endParaRPr lang="en-US" sz="1800" dirty="0"/>
           </a:p>
         </p:txBody>
       </p:sp>
@@ -19571,311 +21703,7 @@
             <a:pPr algn="ctr"/>
             <a:fld id="{F7021451-1387-4CA6-816F-3879F97B5CBC}" type="slidenum">
               <a:rPr b="1" lang="en-US"/>
-              <a:t>5</a:t>
-            </a:fld>
-            <a:endParaRPr lang="en-US"/>
-          </a:p>
-        </p:txBody>
-      </p:sp>
-    </p:spTree>
-  </p:cSld>
-  <p:clrMapOvr>
-    <a:masterClrMapping/>
-  </p:clrMapOvr>
-</p:sld>
-</file>
-
-<file path=ppt/slides/slide50.xml><?xml version="1.0" encoding="utf-8"?>
-<p:sld xmlns:a="http://schemas.openxmlformats.org/drawingml/2006/main" xmlns:r="http://schemas.openxmlformats.org/officeDocument/2006/relationships" xmlns:p="http://schemas.openxmlformats.org/presentationml/2006/main">
-  <p:cSld name="Slide 50">
-    <p:spTree>
-      <p:nvGrpSpPr>
-        <p:cNvPr id="1" name=""/>
-        <p:cNvGrpSpPr/>
-        <p:nvPr/>
-      </p:nvGrpSpPr>
-      <p:grpSpPr>
-        <a:xfrm>
-          <a:off x="0" y="0"/>
-          <a:ext cx="0" cy="0"/>
-          <a:chOff x="0" y="0"/>
-          <a:chExt cx="0" cy="0"/>
-        </a:xfrm>
-      </p:grpSpPr>
-      <p:sp>
-        <p:nvSpPr>
-          <p:cNvPr id="2" name="Text 0"/>
-          <p:cNvSpPr/>
-          <p:nvPr/>
-        </p:nvSpPr>
-        <p:spPr>
-          <a:xfrm>
-            <a:off x="457200" y="713232"/>
-            <a:ext cx="11368735" cy="274320"/>
-          </a:xfrm>
-          <a:prstGeom prst="rect">
-            <a:avLst/>
-          </a:prstGeom>
-          <a:noFill/>
-          <a:ln/>
-        </p:spPr>
-        <p:txBody>
-          <a:bodyPr wrap="square" lIns="0" tIns="0" rIns="0" bIns="0" rtlCol="0" anchor="ctr"/>
-          <a:lstStyle/>
-          <a:p>
-            <a:pPr algn="r" indent="0" marL="0">
-              <a:buNone/>
-            </a:pPr>
-            <a:r>
-              <a:rPr lang="en-US" sz="1400" b="1" dirty="0">
-                <a:solidFill>
-                  <a:srgbClr val="1C3F6E"/>
-                </a:solidFill>
-                <a:latin typeface="Calibri" pitchFamily="34" charset="0"/>
-                <a:ea typeface="Calibri" pitchFamily="34" charset="-122"/>
-                <a:cs typeface="Calibri" pitchFamily="34" charset="-120"/>
-              </a:rPr>
-              <a:t>REFERENCES</a:t>
-            </a:r>
-            <a:endParaRPr lang="en-US" sz="1400" dirty="0"/>
-          </a:p>
-        </p:txBody>
-      </p:sp>
-      <p:pic>
-        <p:nvPicPr>
-          <p:cNvPr id="3" name="Image 0" descr="/home/claude/f4/img/minesec_sheet.png">    </p:cNvPr>
-          <p:cNvPicPr>
-            <a:picLocks noChangeAspect="1"/>
-          </p:cNvPicPr>
-          <p:nvPr/>
-        </p:nvPicPr>
-        <p:blipFill>
-          <a:blip r:embed="rId1"/>
-          <a:stretch>
-            <a:fillRect/>
-          </a:stretch>
-        </p:blipFill>
-        <p:spPr>
-          <a:xfrm>
-            <a:off x="0" y="658368"/>
-            <a:ext cx="5120640" cy="5833872"/>
-          </a:xfrm>
-          <a:prstGeom prst="rect">
-            <a:avLst/>
-          </a:prstGeom>
-        </p:spPr>
-      </p:pic>
-      <p:sp>
-        <p:nvSpPr>
-          <p:cNvPr id="4" name="Text 1"/>
-          <p:cNvSpPr/>
-          <p:nvPr/>
-        </p:nvSpPr>
-        <p:spPr>
-          <a:xfrm>
-            <a:off x="5349240" y="1005840"/>
-            <a:ext cx="6522415" cy="731520"/>
-          </a:xfrm>
-          <a:prstGeom prst="rect">
-            <a:avLst/>
-          </a:prstGeom>
-          <a:noFill/>
-          <a:ln/>
-        </p:spPr>
-        <p:txBody>
-          <a:bodyPr wrap="square" lIns="0" tIns="0" rIns="0" bIns="0" rtlCol="0" anchor="ctr">
-            <a:normAutofit/>
-          </a:bodyPr>
-          <a:lstStyle/>
-          <a:p>
-            <a:pPr algn="ctr" indent="0" marL="0">
-              <a:buNone/>
-            </a:pPr>
-            <a:r>
-              <a:rPr lang="en-US" sz="3600" b="1" dirty="0">
-                <a:solidFill>
-                  <a:srgbClr val="990011"/>
-                </a:solidFill>
-                <a:latin typeface="Times New Roman" pitchFamily="34" charset="0"/>
-                <a:ea typeface="Times New Roman" pitchFamily="34" charset="-122"/>
-                <a:cs typeface="Times New Roman" pitchFamily="34" charset="-120"/>
-              </a:rPr>
-              <a:t>References</a:t>
-            </a:r>
-            <a:endParaRPr lang="en-US" sz="3600" dirty="0"/>
-          </a:p>
-        </p:txBody>
-      </p:sp>
-      <p:sp>
-        <p:nvSpPr>
-          <p:cNvPr id="5" name="Text 2"/>
-          <p:cNvSpPr/>
-          <p:nvPr/>
-        </p:nvSpPr>
-        <p:spPr>
-          <a:xfrm>
-            <a:off x="5349240" y="1783080"/>
-            <a:ext cx="6522415" cy="4663440"/>
-          </a:xfrm>
-          <a:prstGeom prst="rect">
-            <a:avLst/>
-          </a:prstGeom>
-          <a:noFill/>
-          <a:ln/>
-        </p:spPr>
-        <p:txBody>
-          <a:bodyPr wrap="square" lIns="0" tIns="0" rIns="0" bIns="0" rtlCol="0" anchor="t"/>
-          <a:lstStyle/>
-          <a:p>
-            <a:pPr algn="l" marL="342900" indent="-342900">
-              <a:spcAft>
-                <a:spcPts val="800"/>
-              </a:spcAft>
-              <a:buSzPct val="100000"/>
-              <a:buChar char="•"/>
-            </a:pPr>
-            <a:r>
-              <a:rPr lang="en-US" sz="1800" dirty="0">
-                <a:solidFill>
-                  <a:srgbClr val="111111"/>
-                </a:solidFill>
-                <a:latin typeface="Calibri" pitchFamily="34" charset="0"/>
-                <a:ea typeface="Calibri" pitchFamily="34" charset="-122"/>
-                <a:cs typeface="Calibri" pitchFamily="34" charset="-120"/>
-              </a:rPr>
-              <a:t>Geography Syllabus, Forms I–V, MINESEC (2023) — Form 1, Module 3: Protection from the Wrath of Nature.</a:t>
-            </a:r>
-            <a:endParaRPr lang="en-US" sz="1800" dirty="0"/>
-          </a:p>
-          <a:p>
-            <a:pPr algn="l" marL="342900" indent="-342900">
-              <a:spcAft>
-                <a:spcPts val="800"/>
-              </a:spcAft>
-              <a:buSzPct val="100000"/>
-              <a:buChar char="•"/>
-            </a:pPr>
-            <a:r>
-              <a:rPr lang="en-US" sz="1800" dirty="0">
-                <a:solidFill>
-                  <a:srgbClr val="111111"/>
-                </a:solidFill>
-                <a:latin typeface="Calibri" pitchFamily="34" charset="0"/>
-                <a:ea typeface="Calibri" pitchFamily="34" charset="-122"/>
-                <a:cs typeface="Calibri" pitchFamily="34" charset="-120"/>
-              </a:rPr>
-              <a:t>Photo, Activity 1: “Aneroid Barometer, with dial designed by Sir Napier Shaw, 1914” by Negretti &amp; Zambra; Shaw, Sir Napier, CC BY-NC-SA 4.0, via sciencemuseum (https://collection.sciencemuseumgroup.org.uk/objects/co54459/aneroid-barometer-with-dial-designed-by-sir-napier-shaw-1914)</a:t>
-            </a:r>
-            <a:endParaRPr lang="en-US" sz="1800" dirty="0"/>
-          </a:p>
-          <a:p>
-            <a:pPr algn="l" marL="342900" indent="-342900">
-              <a:spcAft>
-                <a:spcPts val="800"/>
-              </a:spcAft>
-              <a:buSzPct val="100000"/>
-              <a:buChar char="•"/>
-            </a:pPr>
-            <a:r>
-              <a:rPr lang="en-US" sz="1800" dirty="0">
-                <a:solidFill>
-                  <a:srgbClr val="111111"/>
-                </a:solidFill>
-                <a:latin typeface="Calibri" pitchFamily="34" charset="0"/>
-                <a:ea typeface="Calibri" pitchFamily="34" charset="-122"/>
-                <a:cs typeface="Calibri" pitchFamily="34" charset="-120"/>
-              </a:rPr>
-              <a:t>Photo, Activity 3: “Windsock” by Wajahat Mahmood, CC BY-SA 2.0, via Flickr (https://www.flickr.com/photos/26116471@N03/6613272897)</a:t>
-            </a:r>
-            <a:endParaRPr lang="en-US" sz="1800" dirty="0"/>
-          </a:p>
-          <a:p>
-            <a:pPr algn="l" marL="342900" indent="-342900">
-              <a:spcAft>
-                <a:spcPts val="800"/>
-              </a:spcAft>
-              <a:buSzPct val="100000"/>
-              <a:buChar char="•"/>
-            </a:pPr>
-            <a:r>
-              <a:rPr lang="en-US" sz="1800" dirty="0">
-                <a:solidFill>
-                  <a:srgbClr val="111111"/>
-                </a:solidFill>
-                <a:latin typeface="Calibri" pitchFamily="34" charset="0"/>
-                <a:ea typeface="Calibri" pitchFamily="34" charset="-122"/>
-                <a:cs typeface="Calibri" pitchFamily="34" charset="-120"/>
-              </a:rPr>
-              <a:t>Photo, Activity 5: “Bamenda sob a poeira do Harmattan” by carlosoliveirareis, CC BY-NC-SA 2.0, via Flickr (https://www.flickr.com/photos/54218923@N00/387054136)</a:t>
-            </a:r>
-            <a:endParaRPr lang="en-US" sz="1800" dirty="0"/>
-          </a:p>
-          <a:p>
-            <a:pPr algn="l" marL="342900" indent="-342900">
-              <a:spcAft>
-                <a:spcPts val="800"/>
-              </a:spcAft>
-              <a:buSzPct val="100000"/>
-              <a:buChar char="•"/>
-            </a:pPr>
-            <a:r>
-              <a:rPr lang="en-US" sz="1800" dirty="0">
-                <a:solidFill>
-                  <a:srgbClr val="111111"/>
-                </a:solidFill>
-                <a:latin typeface="Calibri" pitchFamily="34" charset="0"/>
-                <a:ea typeface="Calibri" pitchFamily="34" charset="-122"/>
-                <a:cs typeface="Calibri" pitchFamily="34" charset="-120"/>
-              </a:rPr>
-              <a:t>Diagrams and animations: drawn for this lesson (Geography Department).</a:t>
-            </a:r>
-            <a:endParaRPr lang="en-US" sz="1800" dirty="0"/>
-          </a:p>
-        </p:txBody>
-      </p:sp>
-      <p:sp>
-        <p:nvSpPr>
-          <p:cNvPr id="25" name="Slide Number Placeholder 0"/>
-          <p:cNvSpPr>
-            <a:spLocks noGrp="1"/>
-          </p:cNvSpPr>
-          <p:nvPr>
-            <p:ph type="sldNum" sz="quarter" idx="4294967295"/>
-          </p:nvPr>
-        </p:nvSpPr>
-        <p:spPr>
-          <a:xfrm>
-            <a:off x="27432" y="91440"/>
-            <a:ext cx="585216" cy="475488"/>
-          </a:xfrm>
-          <a:prstGeom prst="rect">
-            <a:avLst/>
-          </a:prstGeom>
-          <a:extLst>
-            <a:ext uri="{C572A759-6A51-4108-AA02-DFA0A04FC94B}">
-              <ma14:wrappingTextBoxFlag xmlns:ma14="http://schemas.microsoft.com/office/mac/drawingml/2011/main" val="0"/>
-            </a:ext>
-          </a:extLst>
-        </p:spPr>
-        <p:txBody>
-          <a:bodyPr/>
-          <a:lstStyle>
-            <a:lvl1pPr>
-              <a:defRPr sz="2000">
-                <a:solidFill>
-                  <a:srgbClr val="FFFFFF"/>
-                </a:solidFill>
-                <a:latin typeface="Calibri"/>
-                <a:ea typeface="Calibri"/>
-                <a:cs typeface="Calibri"/>
-              </a:defRPr>
-            </a:lvl1pPr>
-          </a:lstStyle>
-          <a:p>
-            <a:pPr algn="ctr"/>
-            <a:fld id="{F7021451-1387-4CA6-816F-3879F97B5CBC}" type="slidenum">
-              <a:rPr b="1" lang="en-US"/>
-              <a:t>50</a:t>
+              <a:t>55</a:t>
             </a:fld>
             <a:endParaRPr lang="en-US"/>
           </a:p>
@@ -20443,7 +22271,7 @@
                 <a:ea typeface="Times New Roman" pitchFamily="34" charset="-122"/>
                 <a:cs typeface="Times New Roman" pitchFamily="34" charset="-120"/>
               </a:rPr>
-              <a:t>Describe the pressure belts and the planetary winds.</a:t>
+              <a:t>Describe the pressure belts and the winds.</a:t>
             </a:r>
             <a:endParaRPr lang="en-US" sz="4000" dirty="0"/>
           </a:p>
@@ -20924,7 +22752,7 @@
                 <a:ea typeface="Times New Roman" pitchFamily="34" charset="-122"/>
                 <a:cs typeface="Times New Roman" pitchFamily="34" charset="-120"/>
               </a:rPr>
-              <a:t>In January, the Harmattan blows dust over Garoua from the north-east. In July, a moist wind from the south-west brings rain. Hadiza asks why the wind changes direction with the seasons.</a:t>
+              <a:t>In January, the Harmattan blows dust over Garoua from the north-east. In July, a moist wind from the south-west brings rain. Hadiza asks her teacher: "Why does the wind change its direction with the seasons?"</a:t>
             </a:r>
             <a:endParaRPr lang="en-US" sz="4000" dirty="0"/>
           </a:p>

--- a/lecons/F1/14_F1_M3_L08_Atmospheric_Circulation.pptx
+++ b/lecons/F1/14_F1_M3_L08_Atmospheric_Circulation.pptx
@@ -3108,7 +3108,7 @@
           <a:p>
             <a:r>
               <a:rPr lang="en-US" dirty="0"/>
-              <a:t>Let us copy Types of Pressure. There are two types of pressure. Copy the point on Low pressure on the left, then draw the diagram on the right: hot air rises. Give it a title and label it clearly.</a:t>
+              <a:t>Let us copy Types of Pressure. The two types of pressure and their measurement are the following. Copy the point on Low pressure on the left, then draw the diagram on the right: hot air rises. Give it a title and label it clearly.</a:t>
             </a:r>
             <a:endParaRPr lang="en-US" dirty="0"/>
           </a:p>
@@ -14152,7 +14152,7 @@
                 <a:ea typeface="Times New Roman" pitchFamily="34" charset="-122"/>
                 <a:cs typeface="Times New Roman" pitchFamily="34" charset="-120"/>
               </a:rPr>
-              <a:t>There are two types of pressure:</a:t>
+              <a:t>The two types of pressure and their measurement are the following:</a:t>
             </a:r>
             <a:endParaRPr lang="en-US" sz="3600" dirty="0"/>
           </a:p>

--- a/lecons/F1/14_F1_M3_L08_Atmospheric_Circulation.pptx
+++ b/lecons/F1/14_F1_M3_L08_Atmospheric_Circulation.pptx
@@ -3460,7 +3460,7 @@
           <a:p>
             <a:r>
               <a:rPr lang="en-US" dirty="0"/>
-              <a:t>Before we start the new lesson, let us correct the homework I gave you at the end of Lesson 7: The Atmosphere. The question was: Draw and label the four layers of the atmosphere. Take out your exercise books.</a:t>
+              <a:t>Before we start the new lesson, let us correct the homework I gave you at the end of Lesson 7: The Atmosphere. The question was: Name the two types of atmospheric pressure. Take out your exercise books.</a:t>
             </a:r>
             <a:endParaRPr lang="en-US" dirty="0"/>
           </a:p>
@@ -4340,7 +4340,7 @@
           <a:p>
             <a:r>
               <a:rPr lang="en-US" dirty="0"/>
-              <a:t>For your homework: Observe the wind for three days and write its direction and whether it is dry or moist. We shall correct it at the beginning of our next lesson.</a:t>
+              <a:t>For your homework: Name three types of atmospheric disturbances. We shall correct it at the beginning of our next lesson.</a:t>
             </a:r>
             <a:endParaRPr lang="en-US" dirty="0"/>
           </a:p>
@@ -4428,7 +4428,7 @@
           <a:p>
             <a:r>
               <a:rPr lang="en-US" dirty="0"/>
-              <a:t>Here is a good answer. From the ground: troposphere (0–12 km, weather), stratosphere (12–50 km, ozone layer), mesosphere (50–85 km), thermosphere (above 85 km). Compare it with your own answer and correct your work in red.</a:t>
+              <a:t>Here is a good answer. High pressure and low pressure. Compare it with your own answer and correct your work in red.</a:t>
             </a:r>
             <a:endParaRPr lang="en-US" dirty="0"/>
           </a:p>
@@ -15297,7 +15297,7 @@
                 <a:ea typeface="Times New Roman" pitchFamily="34" charset="-122"/>
                 <a:cs typeface="Times New Roman" pitchFamily="34" charset="-120"/>
               </a:rPr>
-              <a:t>Draw and label the four layers of the atmosphere.</a:t>
+              <a:t>Name the two types of atmospheric pressure.</a:t>
             </a:r>
             <a:endParaRPr lang="en-US" sz="4000" dirty="0"/>
           </a:p>
@@ -17775,7 +17775,7 @@
                 <a:ea typeface="Times New Roman" pitchFamily="34" charset="-122"/>
                 <a:cs typeface="Times New Roman" pitchFamily="34" charset="-120"/>
               </a:rPr>
-              <a:t>Observe the wind for three days and write its direction and whether it is dry or moist.</a:t>
+              <a:t>Name three types of atmospheric disturbances.</a:t>
             </a:r>
             <a:endParaRPr lang="en-US" sz="4000" dirty="0"/>
           </a:p>
@@ -17994,7 +17994,7 @@
                 <a:ea typeface="Times New Roman" pitchFamily="34" charset="-122"/>
                 <a:cs typeface="Times New Roman" pitchFamily="34" charset="-120"/>
               </a:rPr>
-              <a:t>From the ground: troposphere (0–12 km, weather), stratosphere (12–50 km, ozone layer), mesosphere (50–85 km), thermosphere (above 85 km).</a:t>
+              <a:t>High pressure and low pressure.</a:t>
             </a:r>
             <a:endParaRPr lang="en-US" sz="4000" dirty="0"/>
           </a:p>
@@ -20658,7 +20658,7 @@
                           <a:ea typeface="Calibri" pitchFamily="34" charset="-122"/>
                           <a:cs typeface="Calibri" pitchFamily="34" charset="-120"/>
                         </a:rPr>
-                        <a:t>Observe the wind for three days and write its direction and whether it is dry or moist.</a:t>
+                        <a:t>Name three types of atmospheric disturbances.</a:t>
                       </a:r>
                       <a:endParaRPr lang="en-US" sz="1600" dirty="0">
                         <a:latin typeface="Calibri" charset="0"/>
